--- a/docs/2026-2학기-통계독서탐구-수행평가/발표틀.pptx
+++ b/docs/2026-2학기-통계독서탐구-수행평가/발표틀.pptx
@@ -110,7 +110,7 @@
   <p:extLst>
     <p:ext uri="{521415D9-36F7-43E2-AB2F-B90AF26B5E84}">
       <p14:sectionLst xmlns:p14="http://schemas.microsoft.com/office/powerpoint/2010/main">
-        <p14:section name="발표 틀" id="{8766cd96-8823-59b0-b21f-9d3fb6c34187}">
+        <p14:section name="발표" id="{104e763b-d24d-ac79-27d7-4a0b7325a3ff}">
           <p14:sldIdLst>
             <p14:sldId id="256"/>
             <p14:sldId id="257"/>
@@ -2067,14 +2067,14 @@
               <a:buNone/>
             </a:pPr>
             <a:r>
-              <a:rPr lang="en-US" sz="1000" dirty="0">
+              <a:rPr lang="en-US" sz="1100" dirty="0">
                 <a:solidFill>
                   <a:schemeClr val="accent3"/>
                 </a:solidFill>
               </a:rPr>
               <a:t>내가 다시 만든 표 · 필요한 행·열만 3~8개 · 단위: [  ]</a:t>
             </a:r>
-            <a:endParaRPr lang="en-US" sz="1000" dirty="0"/>
+            <a:endParaRPr lang="en-US" sz="1100" dirty="0"/>
           </a:p>
         </p:txBody>
       </p:sp>

--- a/docs/2026-2학기-통계독서탐구-수행평가/발표틀.pptx
+++ b/docs/2026-2학기-통계독서탐구-수행평가/발표틀.pptx
@@ -110,7 +110,7 @@
   <p:extLst>
     <p:ext uri="{521415D9-36F7-43E2-AB2F-B90AF26B5E84}">
       <p14:sectionLst xmlns:p14="http://schemas.microsoft.com/office/powerpoint/2010/main">
-        <p14:section name="발표" id="{104e763b-d24d-ac79-27d7-4a0b7325a3ff}">
+        <p14:section name="발표" id="{7140dd55-f4b8-efec-91bd-55240d30198a}">
           <p14:sldIdLst>
             <p14:sldId id="256"/>
             <p14:sldId id="257"/>

--- a/docs/2026-2학기-통계독서탐구-수행평가/발표틀.pptx
+++ b/docs/2026-2학기-통계독서탐구-수행평가/발표틀.pptx
@@ -110,7 +110,7 @@
   <p:extLst>
     <p:ext uri="{521415D9-36F7-43E2-AB2F-B90AF26B5E84}">
       <p14:sectionLst xmlns:p14="http://schemas.microsoft.com/office/powerpoint/2010/main">
-        <p14:section name="발표" id="{7140dd55-f4b8-efec-91bd-55240d30198a}">
+        <p14:section name="발표" id="{b7d465d2-3089-b4b7-15cc-729cc04a06c0}">
           <p14:sldIdLst>
             <p14:sldId id="256"/>
             <p14:sldId id="257"/>
@@ -522,7 +522,7 @@
           <a:p>
             <a:r>
               <a:rPr lang="en-US" dirty="0"/>
-              <a:t>20초. 주장 한 문장과 참고한 책을 말합니다.</a:t>
+              <a:t>주장 한 문장과 참고한 책을 말합니다.</a:t>
             </a:r>
             <a:endParaRPr lang="en-US" dirty="0"/>
           </a:p>
@@ -610,7 +610,7 @@
           <a:p>
             <a:r>
               <a:rPr lang="en-US" dirty="0"/>
-              <a:t>40초. 어디서 가져온 자료인지, 모두 조사한 것인지 일부만 뽑아 조사한 것인지, 표를 어떻게 다시 만들었는지 말합니다.</a:t>
+              <a:t>어디서 가져온 자료인지, 모두 조사한 것인지 일부만 뽑아 조사한 것인지, 원자료에서 무엇을 골라 표를 다시 만들었는지 말합니다.</a:t>
             </a:r>
             <a:endParaRPr lang="en-US" dirty="0"/>
           </a:p>
@@ -698,7 +698,7 @@
           <a:p>
             <a:r>
               <a:rPr lang="en-US" dirty="0"/>
-              <a:t>40초. 숫자로 얼마나 늘고 줄었는지, 왜 그렇다고 생각하는지, 근거는 무엇인지 말합니다.</a:t>
+              <a:t>숫자로 얼마나 늘고 줄었는지, 왜 그렇다고 생각하는지, 근거는 무엇인지 말합니다.</a:t>
             </a:r>
             <a:endParaRPr lang="en-US" dirty="0"/>
           </a:p>
@@ -786,7 +786,7 @@
           <a:p>
             <a:r>
               <a:rPr lang="en-US" dirty="0"/>
-              <a:t>20초. 세 문장으로 마무리합니다. 발표가 끝나면 선생님 질문 하나에 답합니다.</a:t>
+              <a:t>세 문장으로 마무리합니다. 발표가 끝나면 선생님 질문 하나에 답합니다.</a:t>
             </a:r>
             <a:endParaRPr lang="en-US" dirty="0"/>
           </a:p>
@@ -959,7 +959,7 @@
                   <a:schemeClr val="accent3"/>
                 </a:solidFill>
               </a:rPr>
-              <a:t>통계독서탐구 · 2학년 확률과 통계 수행평가 · 2분 발표</a:t>
+              <a:t>통계독서탐구 · 2학년 확률과 통계 수행평가</a:t>
             </a:r>
             <a:endParaRPr lang="en-US" sz="900" dirty="0"/>
           </a:p>
@@ -1005,6 +1005,166 @@
             <a:fld id="{F7021451-1387-4CA6-816F-3879F97B5CBC}" type="slidenum">
               <a:rPr b="0" lang="en-US"/>
               <a:t>1002</a:t>
+            </a:fld>
+            <a:endParaRPr lang="en-US"/>
+          </a:p>
+        </p:txBody>
+      </p:sp>
+    </p:spTree>
+  </p:cSld>
+  <p:clrMapOvr>
+    <a:masterClrMapping/>
+  </p:clrMapOvr>
+</p:sldLayout>
+</file>
+
+<file path=ppt/slideLayouts/slideLayout3.xml><?xml version="1.0" encoding="utf-8"?>
+<p:sldLayout xmlns:a="http://schemas.openxmlformats.org/drawingml/2006/main" xmlns:r="http://schemas.openxmlformats.org/officeDocument/2006/relationships" xmlns:p="http://schemas.openxmlformats.org/presentationml/2006/main" preserve="1">
+  <p:cSld name="EXPLAIN">
+    <p:bg>
+      <p:bgPr>
+        <a:solidFill>
+          <a:srgbClr val="EEF3EF"/>
+        </a:solidFill>
+      </p:bgPr>
+    </p:bg>
+    <p:spTree>
+      <p:nvGrpSpPr>
+        <p:cNvPr id="1" name=""/>
+        <p:cNvGrpSpPr/>
+        <p:nvPr/>
+      </p:nvGrpSpPr>
+      <p:grpSpPr>
+        <a:xfrm>
+          <a:off x="0" y="0"/>
+          <a:ext cx="0" cy="0"/>
+          <a:chOff x="0" y="0"/>
+          <a:chExt cx="0" cy="0"/>
+        </a:xfrm>
+      </p:grpSpPr>
+      <p:sp>
+        <p:nvSpPr>
+          <p:cNvPr id="2" name="Text 0"/>
+          <p:cNvSpPr/>
+          <p:nvPr>
+            <p:ph idx="100" type="title" hasCustomPrompt="1"/>
+          </p:nvPr>
+        </p:nvSpPr>
+        <p:spPr>
+          <a:xfrm>
+            <a:off x="960120" y="274320"/>
+            <a:ext cx="7726680" cy="548640"/>
+          </a:xfrm>
+          <a:prstGeom prst="rect">
+            <a:avLst/>
+          </a:prstGeom>
+          <a:noFill/>
+          <a:ln/>
+        </p:spPr>
+        <p:txBody>
+          <a:bodyPr wrap="square" rtlCol="0"/>
+          <a:lstStyle>
+            <a:lvl1pPr algn="l" indent="0" marL="0">
+              <a:buNone/>
+              <a:defRPr lang="en-US" sz="2400" b="1" dirty="0">
+                <a:solidFill>
+                  <a:schemeClr val="tx2"/>
+                </a:solidFill>
+              </a:defRPr>
+            </a:lvl1pPr>
+          </a:lstStyle>
+          <a:p>
+            <a:pPr algn="l" indent="0" marL="0">
+              <a:buNone/>
+            </a:pPr>
+            <a:r>
+              <a:rPr lang="en-US" sz="2400" b="1" dirty="0">
+                <a:solidFill>
+                  <a:schemeClr val="tx2"/>
+                </a:solidFill>
+              </a:rPr>
+              <a:t>제목</a:t>
+            </a:r>
+            <a:endParaRPr lang="en-US" sz="2400" dirty="0"/>
+          </a:p>
+        </p:txBody>
+      </p:sp>
+      <p:sp>
+        <p:nvSpPr>
+          <p:cNvPr id="3" name="Text 0"/>
+          <p:cNvSpPr txBox="1"/>
+          <p:nvPr/>
+        </p:nvSpPr>
+        <p:spPr>
+          <a:xfrm>
+            <a:off x="457200" y="4754880"/>
+            <a:ext cx="5943600" cy="228600"/>
+          </a:xfrm>
+          <a:prstGeom prst="rect">
+            <a:avLst/>
+          </a:prstGeom>
+          <a:noFill/>
+          <a:ln/>
+        </p:spPr>
+        <p:txBody>
+          <a:bodyPr wrap="square" lIns="0" tIns="0" rIns="0" bIns="0" rtlCol="0" anchor="ctr"/>
+          <a:lstStyle/>
+          <a:p>
+            <a:pPr indent="0" marL="0">
+              <a:buNone/>
+            </a:pPr>
+            <a:r>
+              <a:rPr lang="en-US" sz="900" dirty="0">
+                <a:solidFill>
+                  <a:schemeClr val="accent3"/>
+                </a:solidFill>
+              </a:rPr>
+              <a:t>통계독서탐구 · 2학년 확률과 통계 수행평가</a:t>
+            </a:r>
+            <a:endParaRPr lang="en-US" sz="900" dirty="0"/>
+          </a:p>
+        </p:txBody>
+      </p:sp>
+      <p:sp>
+        <p:nvSpPr>
+          <p:cNvPr id="25" name="Slide Number Placeholder 0"/>
+          <p:cNvSpPr>
+            <a:spLocks noGrp="1"/>
+          </p:cNvSpPr>
+          <p:nvPr>
+            <p:ph type="sldNum" sz="quarter" idx="4294967295"/>
+          </p:nvPr>
+        </p:nvSpPr>
+        <p:spPr>
+          <a:xfrm>
+            <a:off x="8229600" y="4754880"/>
+            <a:ext cx="457200" cy="228600"/>
+          </a:xfrm>
+          <a:prstGeom prst="rect">
+            <a:avLst/>
+          </a:prstGeom>
+          <a:extLst>
+            <a:ext uri="{C572A759-6A51-4108-AA02-DFA0A04FC94B}">
+              <ma14:wrappingTextBoxFlag xmlns:ma14="http://schemas.microsoft.com/office/mac/drawingml/2011/main" val="0"/>
+            </a:ext>
+          </a:extLst>
+        </p:spPr>
+        <p:txBody>
+          <a:bodyPr/>
+          <a:lstStyle>
+            <a:lvl1pPr>
+              <a:defRPr sz="900">
+                <a:solidFill>
+                  <a:srgbClr val="6B6759"/>
+                </a:solidFill>
+              </a:defRPr>
+            </a:lvl1pPr>
+          </a:lstStyle>
+          <a:p>
+            <a:pPr algn="r"/>
+            <a:fld id="{F7021451-1387-4CA6-816F-3879F97B5CBC}" type="slidenum">
+              <a:rPr b="0" lang="en-US"/>
+              <a:t>1003</a:t>
             </a:fld>
             <a:endParaRPr lang="en-US"/>
           </a:p>
@@ -1086,6 +1246,7 @@
   <p:sldLayoutIdLst>
     <p:sldLayoutId id="2147483649" r:id="rId1"/>
     <p:sldLayoutId id="2147483650" r:id="rId2"/>
+    <p:sldLayoutId id="2147483651" r:id="rId3"/>
   </p:sldLayoutIdLst>
   <p:hf sldNum="0" hdr="0" ftr="0" dt="0"/>
   <p:txStyles>
@@ -1602,8 +1763,8 @@
         </p:nvSpPr>
         <p:spPr>
           <a:xfrm>
-            <a:off x="685800" y="3291840"/>
-            <a:ext cx="3474720" cy="1005840"/>
+            <a:off x="685800" y="3246120"/>
+            <a:ext cx="3474720" cy="1097280"/>
           </a:xfrm>
           <a:prstGeom prst="rect">
             <a:avLst/>
@@ -1627,6 +1788,20 @@
                 </a:solidFill>
               </a:rPr>
               <a:t>2학년 [  ]반 [  ]번 [이름]</a:t>
+            </a:r>
+            <a:endParaRPr lang="en-US" sz="1800" dirty="0"/>
+          </a:p>
+          <a:p>
+            <a:pPr indent="0" marL="0">
+              <a:buNone/>
+            </a:pPr>
+            <a:r>
+              <a:rPr lang="en-US" sz="1800" dirty="0">
+                <a:solidFill>
+                  <a:schemeClr val="tx1"/>
+                </a:solidFill>
+              </a:rPr>
+              <a:t>진로: [  ]</a:t>
             </a:r>
             <a:endParaRPr lang="en-US" sz="1800" dirty="0"/>
           </a:p>
@@ -1948,12 +2123,12 @@
         </p:nvSpPr>
         <p:spPr>
           <a:xfrm>
-            <a:off x="457200" y="1005840"/>
-            <a:ext cx="4114800" cy="1417320"/>
+            <a:off x="457200" y="960120"/>
+            <a:ext cx="8229600" cy="868680"/>
           </a:xfrm>
           <a:prstGeom prst="roundRect">
             <a:avLst>
-              <a:gd name="adj" fmla="val 5161"/>
+              <a:gd name="adj" fmla="val 8421"/>
             </a:avLst>
           </a:prstGeom>
           <a:solidFill>
@@ -1975,8 +2150,8 @@
         </p:nvSpPr>
         <p:spPr>
           <a:xfrm>
-            <a:off x="640080" y="1143000"/>
-            <a:ext cx="3749040" cy="1188720"/>
+            <a:off x="640080" y="1051560"/>
+            <a:ext cx="7863840" cy="685800"/>
           </a:xfrm>
           <a:prstGeom prst="rect">
             <a:avLst/>
@@ -1992,66 +2167,49 @@
           <a:p>
             <a:pPr indent="0" marL="0">
               <a:spcAft>
-                <a:spcPts val="400"/>
+                <a:spcPts val="300"/>
               </a:spcAft>
               <a:buNone/>
             </a:pPr>
             <a:r>
-              <a:rPr lang="en-US" sz="1300" dirty="0">
+              <a:rPr lang="en-US" sz="1200" dirty="0">
                 <a:solidFill>
                   <a:schemeClr val="tx1"/>
                 </a:solidFill>
               </a:rPr>
-              <a:t>기관: [자료를 만든 기관]</a:t>
+              <a:t>기관: [자료를 만든 기관]  ·  조사 이름: 「[조사 이름]」</a:t>
             </a:r>
-            <a:endParaRPr lang="en-US" sz="1300" dirty="0"/>
+            <a:endParaRPr lang="en-US" sz="1200" dirty="0"/>
           </a:p>
           <a:p>
             <a:pPr indent="0" marL="0">
               <a:spcAft>
-                <a:spcPts val="400"/>
+                <a:spcPts val="300"/>
               </a:spcAft>
               <a:buNone/>
             </a:pPr>
             <a:r>
-              <a:rPr lang="en-US" sz="1300" dirty="0">
+              <a:rPr lang="en-US" sz="1200" dirty="0">
                 <a:solidFill>
                   <a:schemeClr val="tx1"/>
                 </a:solidFill>
               </a:rPr>
-              <a:t>조사(통계) 이름: 「[조사 이름]」</a:t>
+              <a:t>대상: [누구를, 몇 명을]  ·  조사 방식: 모두 조사(전수) / 일부만 뽑아 조사(표본) ← 하나만 남깁니다</a:t>
             </a:r>
-            <a:endParaRPr lang="en-US" sz="1300" dirty="0"/>
-          </a:p>
-          <a:p>
-            <a:pPr indent="0" marL="0">
-              <a:spcAft>
-                <a:spcPts val="400"/>
-              </a:spcAft>
-              <a:buNone/>
-            </a:pPr>
-            <a:r>
-              <a:rPr lang="en-US" sz="1300" dirty="0">
-                <a:solidFill>
-                  <a:schemeClr val="tx1"/>
-                </a:solidFill>
-              </a:rPr>
-              <a:t>조사 방식: 모두 조사(전수) · 일부만 뽑아 조사(표본)  ← 하나만 남깁니다</a:t>
-            </a:r>
-            <a:endParaRPr lang="en-US" sz="1300" dirty="0"/>
-          </a:p>
-        </p:txBody>
-      </p:sp>
-      <p:sp>
-        <p:nvSpPr>
-          <p:cNvPr id="7" name="표 안내"/>
+            <a:endParaRPr lang="en-US" sz="1200" dirty="0"/>
+          </a:p>
+        </p:txBody>
+      </p:sp>
+      <p:sp>
+        <p:nvSpPr>
+          <p:cNvPr id="7" name="원자료 라벨"/>
           <p:cNvSpPr txBox="1"/>
           <p:nvPr/>
         </p:nvSpPr>
         <p:spPr>
           <a:xfrm>
-            <a:off x="457200" y="2560320"/>
-            <a:ext cx="4114800" cy="256032"/>
+            <a:off x="457200" y="1920240"/>
+            <a:ext cx="4114800" cy="274320"/>
           </a:xfrm>
           <a:prstGeom prst="rect">
             <a:avLst/>
@@ -2067,12 +2225,12 @@
               <a:buNone/>
             </a:pPr>
             <a:r>
-              <a:rPr lang="en-US" sz="1100" dirty="0">
+              <a:rPr lang="en-US" sz="1100" b="1" dirty="0">
                 <a:solidFill>
-                  <a:schemeClr val="accent3"/>
+                  <a:schemeClr val="tx2"/>
                 </a:solidFill>
               </a:rPr>
-              <a:t>내가 다시 만든 표 · 필요한 행·열만 3~8개 · 단위: [  ]</a:t>
+              <a:t>원자료 표 (일부 발췌)</a:t>
             </a:r>
             <a:endParaRPr lang="en-US" sz="1100" dirty="0"/>
           </a:p>
@@ -2080,7 +2238,7 @@
       </p:sp>
       <p:graphicFrame>
         <p:nvGraphicFramePr>
-          <p:cNvPr id="3" name="내가 만든 표"/>
+          <p:cNvPr id="3" name="원자료 표"/>
           <p:cNvGraphicFramePr>
             <a:graphicFrameLocks noGrp="1"/>
           </p:cNvGraphicFramePr>
@@ -2093,7 +2251,7 @@
           </p:nvPr>
         </p:nvGraphicFramePr>
         <p:xfrm>
-          <a:off x="457200" y="2834640"/>
+          <a:off x="457200" y="2212848"/>
           <a:ext cx="4114800" cy="914400"/>
         </p:xfrm>
         <a:graphic>
@@ -2101,11 +2259,12 @@
             <a:tbl>
               <a:tblPr/>
               <a:tblGrid>
-                <a:gridCol w="1371600"/>
-                <a:gridCol w="1371600"/>
-                <a:gridCol w="1371600"/>
+                <a:gridCol w="1097280"/>
+                <a:gridCol w="1005840"/>
+                <a:gridCol w="1005840"/>
+                <a:gridCol w="1005840"/>
               </a:tblGrid>
-              <a:tr h="274320">
+              <a:tr h="292608">
                 <a:tc>
                   <a:txBody>
                     <a:bodyPr/>
@@ -2115,17 +2274,17 @@
                         <a:buNone/>
                       </a:pPr>
                       <a:r>
-                        <a:rPr lang="en-US" sz="1200" b="1" dirty="0">
+                        <a:rPr lang="en-US" sz="1000" b="1" dirty="0">
                           <a:solidFill>
                             <a:srgbClr val="1B211D"/>
                           </a:solidFill>
                         </a:rPr>
                         <a:t>구분</a:t>
                       </a:r>
-                      <a:endParaRPr lang="en-US" sz="1200" dirty="0"/>
+                      <a:endParaRPr lang="en-US" sz="1000" dirty="0"/>
                     </a:p>
                   </a:txBody>
-                  <a:tcPr marL="91440" marR="91440" marT="45720" marB="45720" anchor="ctr">
+                  <a:tcPr marL="27432" marR="27432" marT="27432" marB="27432" anchor="ctr">
                     <a:lnL w="9525" cap="flat" cmpd="sng" algn="ctr">
                       <a:solidFill>
                         <a:srgbClr val="B9B4A6"/>
@@ -2175,10 +2334,10 @@
                       <a:pPr algn="ctr" indent="0" marL="0">
                         <a:buNone/>
                       </a:pPr>
-                      <a:endParaRPr lang="en-US" sz="1200" dirty="0"/>
+                      <a:endParaRPr lang="en-US" sz="1000" dirty="0"/>
                     </a:p>
                   </a:txBody>
-                  <a:tcPr marL="91440" marR="91440" marT="45720" marB="45720" anchor="ctr">
+                  <a:tcPr marL="27432" marR="27432" marT="27432" marB="27432" anchor="ctr">
                     <a:lnL w="9525" cap="flat" cmpd="sng" algn="ctr">
                       <a:solidFill>
                         <a:srgbClr val="B9B4A6"/>
@@ -2228,10 +2387,10 @@
                       <a:pPr algn="ctr" indent="0" marL="0">
                         <a:buNone/>
                       </a:pPr>
-                      <a:endParaRPr lang="en-US" sz="1200" dirty="0"/>
+                      <a:endParaRPr lang="en-US" sz="1000" dirty="0"/>
                     </a:p>
                   </a:txBody>
-                  <a:tcPr marL="91440" marR="91440" marT="45720" marB="45720" anchor="ctr">
+                  <a:tcPr marL="27432" marR="27432" marT="27432" marB="27432" anchor="ctr">
                     <a:lnL w="9525" cap="flat" cmpd="sng" algn="ctr">
                       <a:solidFill>
                         <a:srgbClr val="B9B4A6"/>
@@ -2273,8 +2432,6 @@
                     </a:solidFill>
                   </a:tcPr>
                 </a:tc>
-              </a:tr>
-              <a:tr h="274320">
                 <a:tc>
                   <a:txBody>
                     <a:bodyPr/>
@@ -2283,10 +2440,65 @@
                       <a:pPr algn="ctr" indent="0" marL="0">
                         <a:buNone/>
                       </a:pPr>
-                      <a:endParaRPr lang="en-US" sz="1200" dirty="0"/>
+                      <a:endParaRPr lang="en-US" sz="1000" dirty="0"/>
                     </a:p>
                   </a:txBody>
-                  <a:tcPr marL="91440" marR="91440" marT="45720" marB="45720" anchor="ctr">
+                  <a:tcPr marL="27432" marR="27432" marT="27432" marB="27432" anchor="ctr">
+                    <a:lnL w="9525" cap="flat" cmpd="sng" algn="ctr">
+                      <a:solidFill>
+                        <a:srgbClr val="B9B4A6"/>
+                      </a:solidFill>
+                      <a:prstDash val="solid"/>
+                      <a:round/>
+                      <a:headEnd type="none" w="med" len="med"/>
+                      <a:tailEnd type="none" w="med" len="med"/>
+                    </a:lnL>
+                    <a:lnR w="9525" cap="flat" cmpd="sng" algn="ctr">
+                      <a:solidFill>
+                        <a:srgbClr val="B9B4A6"/>
+                      </a:solidFill>
+                      <a:prstDash val="solid"/>
+                      <a:round/>
+                      <a:headEnd type="none" w="med" len="med"/>
+                      <a:tailEnd type="none" w="med" len="med"/>
+                    </a:lnR>
+                    <a:lnT w="9525" cap="flat" cmpd="sng" algn="ctr">
+                      <a:solidFill>
+                        <a:srgbClr val="B9B4A6"/>
+                      </a:solidFill>
+                      <a:prstDash val="solid"/>
+                      <a:round/>
+                      <a:headEnd type="none" w="med" len="med"/>
+                      <a:tailEnd type="none" w="med" len="med"/>
+                    </a:lnT>
+                    <a:lnB w="9525" cap="flat" cmpd="sng" algn="ctr">
+                      <a:solidFill>
+                        <a:srgbClr val="B9B4A6"/>
+                      </a:solidFill>
+                      <a:prstDash val="solid"/>
+                      <a:round/>
+                      <a:headEnd type="none" w="med" len="med"/>
+                      <a:tailEnd type="none" w="med" len="med"/>
+                    </a:lnB>
+                    <a:solidFill>
+                      <a:srgbClr val="EEF3EF"/>
+                    </a:solidFill>
+                  </a:tcPr>
+                </a:tc>
+              </a:tr>
+              <a:tr h="292608">
+                <a:tc>
+                  <a:txBody>
+                    <a:bodyPr/>
+                    <a:lstStyle/>
+                    <a:p>
+                      <a:pPr algn="ctr" indent="0" marL="0">
+                        <a:buNone/>
+                      </a:pPr>
+                      <a:endParaRPr lang="en-US" sz="1000" dirty="0"/>
+                    </a:p>
+                  </a:txBody>
+                  <a:tcPr marL="27432" marR="27432" marT="27432" marB="27432" anchor="ctr">
                     <a:lnL w="9525" cap="flat" cmpd="sng" algn="ctr">
                       <a:solidFill>
                         <a:srgbClr val="B9B4A6"/>
@@ -2333,10 +2545,10 @@
                       <a:pPr algn="ctr" indent="0" marL="0">
                         <a:buNone/>
                       </a:pPr>
-                      <a:endParaRPr lang="en-US" sz="1200" dirty="0"/>
+                      <a:endParaRPr lang="en-US" sz="1000" dirty="0"/>
                     </a:p>
                   </a:txBody>
-                  <a:tcPr marL="91440" marR="91440" marT="45720" marB="45720" anchor="ctr">
+                  <a:tcPr marL="27432" marR="27432" marT="27432" marB="27432" anchor="ctr">
                     <a:lnL w="9525" cap="flat" cmpd="sng" algn="ctr">
                       <a:solidFill>
                         <a:srgbClr val="B9B4A6"/>
@@ -2383,62 +2595,10 @@
                       <a:pPr algn="ctr" indent="0" marL="0">
                         <a:buNone/>
                       </a:pPr>
-                      <a:endParaRPr lang="en-US" sz="1200" dirty="0"/>
+                      <a:endParaRPr lang="en-US" sz="1000" dirty="0"/>
                     </a:p>
                   </a:txBody>
-                  <a:tcPr marL="91440" marR="91440" marT="45720" marB="45720" anchor="ctr">
-                    <a:lnL w="9525" cap="flat" cmpd="sng" algn="ctr">
-                      <a:solidFill>
-                        <a:srgbClr val="B9B4A6"/>
-                      </a:solidFill>
-                      <a:prstDash val="solid"/>
-                      <a:round/>
-                      <a:headEnd type="none" w="med" len="med"/>
-                      <a:tailEnd type="none" w="med" len="med"/>
-                    </a:lnL>
-                    <a:lnR w="9525" cap="flat" cmpd="sng" algn="ctr">
-                      <a:solidFill>
-                        <a:srgbClr val="B9B4A6"/>
-                      </a:solidFill>
-                      <a:prstDash val="solid"/>
-                      <a:round/>
-                      <a:headEnd type="none" w="med" len="med"/>
-                      <a:tailEnd type="none" w="med" len="med"/>
-                    </a:lnR>
-                    <a:lnT w="9525" cap="flat" cmpd="sng" algn="ctr">
-                      <a:solidFill>
-                        <a:srgbClr val="B9B4A6"/>
-                      </a:solidFill>
-                      <a:prstDash val="solid"/>
-                      <a:round/>
-                      <a:headEnd type="none" w="med" len="med"/>
-                      <a:tailEnd type="none" w="med" len="med"/>
-                    </a:lnT>
-                    <a:lnB w="9525" cap="flat" cmpd="sng" algn="ctr">
-                      <a:solidFill>
-                        <a:srgbClr val="B9B4A6"/>
-                      </a:solidFill>
-                      <a:prstDash val="solid"/>
-                      <a:round/>
-                      <a:headEnd type="none" w="med" len="med"/>
-                      <a:tailEnd type="none" w="med" len="med"/>
-                    </a:lnB>
-                  </a:tcPr>
-                </a:tc>
-              </a:tr>
-              <a:tr h="274320">
-                <a:tc>
-                  <a:txBody>
-                    <a:bodyPr/>
-                    <a:lstStyle/>
-                    <a:p>
-                      <a:pPr algn="ctr" indent="0" marL="0">
-                        <a:buNone/>
-                      </a:pPr>
-                      <a:endParaRPr lang="en-US" sz="1200" dirty="0"/>
-                    </a:p>
-                  </a:txBody>
-                  <a:tcPr marL="91440" marR="91440" marT="45720" marB="45720" anchor="ctr">
+                  <a:tcPr marL="27432" marR="27432" marT="27432" marB="27432" anchor="ctr">
                     <a:lnL w="9525" cap="flat" cmpd="sng" algn="ctr">
                       <a:solidFill>
                         <a:srgbClr val="B9B4A6"/>
@@ -2485,10 +2645,62 @@
                       <a:pPr algn="ctr" indent="0" marL="0">
                         <a:buNone/>
                       </a:pPr>
-                      <a:endParaRPr lang="en-US" sz="1200" dirty="0"/>
+                      <a:endParaRPr lang="en-US" sz="1000" dirty="0"/>
                     </a:p>
                   </a:txBody>
-                  <a:tcPr marL="91440" marR="91440" marT="45720" marB="45720" anchor="ctr">
+                  <a:tcPr marL="27432" marR="27432" marT="27432" marB="27432" anchor="ctr">
+                    <a:lnL w="9525" cap="flat" cmpd="sng" algn="ctr">
+                      <a:solidFill>
+                        <a:srgbClr val="B9B4A6"/>
+                      </a:solidFill>
+                      <a:prstDash val="solid"/>
+                      <a:round/>
+                      <a:headEnd type="none" w="med" len="med"/>
+                      <a:tailEnd type="none" w="med" len="med"/>
+                    </a:lnL>
+                    <a:lnR w="9525" cap="flat" cmpd="sng" algn="ctr">
+                      <a:solidFill>
+                        <a:srgbClr val="B9B4A6"/>
+                      </a:solidFill>
+                      <a:prstDash val="solid"/>
+                      <a:round/>
+                      <a:headEnd type="none" w="med" len="med"/>
+                      <a:tailEnd type="none" w="med" len="med"/>
+                    </a:lnR>
+                    <a:lnT w="9525" cap="flat" cmpd="sng" algn="ctr">
+                      <a:solidFill>
+                        <a:srgbClr val="B9B4A6"/>
+                      </a:solidFill>
+                      <a:prstDash val="solid"/>
+                      <a:round/>
+                      <a:headEnd type="none" w="med" len="med"/>
+                      <a:tailEnd type="none" w="med" len="med"/>
+                    </a:lnT>
+                    <a:lnB w="9525" cap="flat" cmpd="sng" algn="ctr">
+                      <a:solidFill>
+                        <a:srgbClr val="B9B4A6"/>
+                      </a:solidFill>
+                      <a:prstDash val="solid"/>
+                      <a:round/>
+                      <a:headEnd type="none" w="med" len="med"/>
+                      <a:tailEnd type="none" w="med" len="med"/>
+                    </a:lnB>
+                  </a:tcPr>
+                </a:tc>
+              </a:tr>
+              <a:tr h="292608">
+                <a:tc>
+                  <a:txBody>
+                    <a:bodyPr/>
+                    <a:lstStyle/>
+                    <a:p>
+                      <a:pPr algn="ctr" indent="0" marL="0">
+                        <a:buNone/>
+                      </a:pPr>
+                      <a:endParaRPr lang="en-US" sz="1000" dirty="0"/>
+                    </a:p>
+                  </a:txBody>
+                  <a:tcPr marL="27432" marR="27432" marT="27432" marB="27432" anchor="ctr">
                     <a:lnL w="9525" cap="flat" cmpd="sng" algn="ctr">
                       <a:solidFill>
                         <a:srgbClr val="B9B4A6"/>
@@ -2535,62 +2747,10 @@
                       <a:pPr algn="ctr" indent="0" marL="0">
                         <a:buNone/>
                       </a:pPr>
-                      <a:endParaRPr lang="en-US" sz="1200" dirty="0"/>
+                      <a:endParaRPr lang="en-US" sz="1000" dirty="0"/>
                     </a:p>
                   </a:txBody>
-                  <a:tcPr marL="91440" marR="91440" marT="45720" marB="45720" anchor="ctr">
-                    <a:lnL w="9525" cap="flat" cmpd="sng" algn="ctr">
-                      <a:solidFill>
-                        <a:srgbClr val="B9B4A6"/>
-                      </a:solidFill>
-                      <a:prstDash val="solid"/>
-                      <a:round/>
-                      <a:headEnd type="none" w="med" len="med"/>
-                      <a:tailEnd type="none" w="med" len="med"/>
-                    </a:lnL>
-                    <a:lnR w="9525" cap="flat" cmpd="sng" algn="ctr">
-                      <a:solidFill>
-                        <a:srgbClr val="B9B4A6"/>
-                      </a:solidFill>
-                      <a:prstDash val="solid"/>
-                      <a:round/>
-                      <a:headEnd type="none" w="med" len="med"/>
-                      <a:tailEnd type="none" w="med" len="med"/>
-                    </a:lnR>
-                    <a:lnT w="9525" cap="flat" cmpd="sng" algn="ctr">
-                      <a:solidFill>
-                        <a:srgbClr val="B9B4A6"/>
-                      </a:solidFill>
-                      <a:prstDash val="solid"/>
-                      <a:round/>
-                      <a:headEnd type="none" w="med" len="med"/>
-                      <a:tailEnd type="none" w="med" len="med"/>
-                    </a:lnT>
-                    <a:lnB w="9525" cap="flat" cmpd="sng" algn="ctr">
-                      <a:solidFill>
-                        <a:srgbClr val="B9B4A6"/>
-                      </a:solidFill>
-                      <a:prstDash val="solid"/>
-                      <a:round/>
-                      <a:headEnd type="none" w="med" len="med"/>
-                      <a:tailEnd type="none" w="med" len="med"/>
-                    </a:lnB>
-                  </a:tcPr>
-                </a:tc>
-              </a:tr>
-              <a:tr h="274320">
-                <a:tc>
-                  <a:txBody>
-                    <a:bodyPr/>
-                    <a:lstStyle/>
-                    <a:p>
-                      <a:pPr algn="ctr" indent="0" marL="0">
-                        <a:buNone/>
-                      </a:pPr>
-                      <a:endParaRPr lang="en-US" sz="1200" dirty="0"/>
-                    </a:p>
-                  </a:txBody>
-                  <a:tcPr marL="91440" marR="91440" marT="45720" marB="45720" anchor="ctr">
+                  <a:tcPr marL="27432" marR="27432" marT="27432" marB="27432" anchor="ctr">
                     <a:lnL w="9525" cap="flat" cmpd="sng" algn="ctr">
                       <a:solidFill>
                         <a:srgbClr val="B9B4A6"/>
@@ -2637,10 +2797,10 @@
                       <a:pPr algn="ctr" indent="0" marL="0">
                         <a:buNone/>
                       </a:pPr>
-                      <a:endParaRPr lang="en-US" sz="1200" dirty="0"/>
+                      <a:endParaRPr lang="en-US" sz="1000" dirty="0"/>
                     </a:p>
                   </a:txBody>
-                  <a:tcPr marL="91440" marR="91440" marT="45720" marB="45720" anchor="ctr">
+                  <a:tcPr marL="27432" marR="27432" marT="27432" marB="27432" anchor="ctr">
                     <a:lnL w="9525" cap="flat" cmpd="sng" algn="ctr">
                       <a:solidFill>
                         <a:srgbClr val="B9B4A6"/>
@@ -2687,10 +2847,10 @@
                       <a:pPr algn="ctr" indent="0" marL="0">
                         <a:buNone/>
                       </a:pPr>
-                      <a:endParaRPr lang="en-US" sz="1200" dirty="0"/>
+                      <a:endParaRPr lang="en-US" sz="1000" dirty="0"/>
                     </a:p>
                   </a:txBody>
-                  <a:tcPr marL="91440" marR="91440" marT="45720" marB="45720" anchor="ctr">
+                  <a:tcPr marL="27432" marR="27432" marT="27432" marB="27432" anchor="ctr">
                     <a:lnL w="9525" cap="flat" cmpd="sng" algn="ctr">
                       <a:solidFill>
                         <a:srgbClr val="B9B4A6"/>
@@ -2730,7 +2890,7 @@
                   </a:tcPr>
                 </a:tc>
               </a:tr>
-              <a:tr h="274320">
+              <a:tr h="292608">
                 <a:tc>
                   <a:txBody>
                     <a:bodyPr/>
@@ -2739,10 +2899,10 @@
                       <a:pPr algn="ctr" indent="0" marL="0">
                         <a:buNone/>
                       </a:pPr>
-                      <a:endParaRPr lang="en-US" sz="1200" dirty="0"/>
+                      <a:endParaRPr lang="en-US" sz="1000" dirty="0"/>
                     </a:p>
                   </a:txBody>
-                  <a:tcPr marL="91440" marR="91440" marT="45720" marB="45720" anchor="ctr">
+                  <a:tcPr marL="27432" marR="27432" marT="27432" marB="27432" anchor="ctr">
                     <a:lnL w="9525" cap="flat" cmpd="sng" algn="ctr">
                       <a:solidFill>
                         <a:srgbClr val="B9B4A6"/>
@@ -2789,10 +2949,10 @@
                       <a:pPr algn="ctr" indent="0" marL="0">
                         <a:buNone/>
                       </a:pPr>
-                      <a:endParaRPr lang="en-US" sz="1200" dirty="0"/>
+                      <a:endParaRPr lang="en-US" sz="1000" dirty="0"/>
                     </a:p>
                   </a:txBody>
-                  <a:tcPr marL="91440" marR="91440" marT="45720" marB="45720" anchor="ctr">
+                  <a:tcPr marL="27432" marR="27432" marT="27432" marB="27432" anchor="ctr">
                     <a:lnL w="9525" cap="flat" cmpd="sng" algn="ctr">
                       <a:solidFill>
                         <a:srgbClr val="B9B4A6"/>
@@ -2839,62 +2999,10 @@
                       <a:pPr algn="ctr" indent="0" marL="0">
                         <a:buNone/>
                       </a:pPr>
-                      <a:endParaRPr lang="en-US" sz="1200" dirty="0"/>
+                      <a:endParaRPr lang="en-US" sz="1000" dirty="0"/>
                     </a:p>
                   </a:txBody>
-                  <a:tcPr marL="91440" marR="91440" marT="45720" marB="45720" anchor="ctr">
-                    <a:lnL w="9525" cap="flat" cmpd="sng" algn="ctr">
-                      <a:solidFill>
-                        <a:srgbClr val="B9B4A6"/>
-                      </a:solidFill>
-                      <a:prstDash val="solid"/>
-                      <a:round/>
-                      <a:headEnd type="none" w="med" len="med"/>
-                      <a:tailEnd type="none" w="med" len="med"/>
-                    </a:lnL>
-                    <a:lnR w="9525" cap="flat" cmpd="sng" algn="ctr">
-                      <a:solidFill>
-                        <a:srgbClr val="B9B4A6"/>
-                      </a:solidFill>
-                      <a:prstDash val="solid"/>
-                      <a:round/>
-                      <a:headEnd type="none" w="med" len="med"/>
-                      <a:tailEnd type="none" w="med" len="med"/>
-                    </a:lnR>
-                    <a:lnT w="9525" cap="flat" cmpd="sng" algn="ctr">
-                      <a:solidFill>
-                        <a:srgbClr val="B9B4A6"/>
-                      </a:solidFill>
-                      <a:prstDash val="solid"/>
-                      <a:round/>
-                      <a:headEnd type="none" w="med" len="med"/>
-                      <a:tailEnd type="none" w="med" len="med"/>
-                    </a:lnT>
-                    <a:lnB w="9525" cap="flat" cmpd="sng" algn="ctr">
-                      <a:solidFill>
-                        <a:srgbClr val="B9B4A6"/>
-                      </a:solidFill>
-                      <a:prstDash val="solid"/>
-                      <a:round/>
-                      <a:headEnd type="none" w="med" len="med"/>
-                      <a:tailEnd type="none" w="med" len="med"/>
-                    </a:lnB>
-                  </a:tcPr>
-                </a:tc>
-              </a:tr>
-              <a:tr h="274320">
-                <a:tc>
-                  <a:txBody>
-                    <a:bodyPr/>
-                    <a:lstStyle/>
-                    <a:p>
-                      <a:pPr algn="ctr" indent="0" marL="0">
-                        <a:buNone/>
-                      </a:pPr>
-                      <a:endParaRPr lang="en-US" sz="1200" dirty="0"/>
-                    </a:p>
-                  </a:txBody>
-                  <a:tcPr marL="91440" marR="91440" marT="45720" marB="45720" anchor="ctr">
+                  <a:tcPr marL="27432" marR="27432" marT="27432" marB="27432" anchor="ctr">
                     <a:lnL w="9525" cap="flat" cmpd="sng" algn="ctr">
                       <a:solidFill>
                         <a:srgbClr val="B9B4A6"/>
@@ -2941,10 +3049,372 @@
                       <a:pPr algn="ctr" indent="0" marL="0">
                         <a:buNone/>
                       </a:pPr>
-                      <a:endParaRPr lang="en-US" sz="1200" dirty="0"/>
+                      <a:endParaRPr lang="en-US" sz="1000" dirty="0"/>
                     </a:p>
                   </a:txBody>
-                  <a:tcPr marL="91440" marR="91440" marT="45720" marB="45720" anchor="ctr">
+                  <a:tcPr marL="27432" marR="27432" marT="27432" marB="27432" anchor="ctr">
+                    <a:lnL w="9525" cap="flat" cmpd="sng" algn="ctr">
+                      <a:solidFill>
+                        <a:srgbClr val="B9B4A6"/>
+                      </a:solidFill>
+                      <a:prstDash val="solid"/>
+                      <a:round/>
+                      <a:headEnd type="none" w="med" len="med"/>
+                      <a:tailEnd type="none" w="med" len="med"/>
+                    </a:lnL>
+                    <a:lnR w="9525" cap="flat" cmpd="sng" algn="ctr">
+                      <a:solidFill>
+                        <a:srgbClr val="B9B4A6"/>
+                      </a:solidFill>
+                      <a:prstDash val="solid"/>
+                      <a:round/>
+                      <a:headEnd type="none" w="med" len="med"/>
+                      <a:tailEnd type="none" w="med" len="med"/>
+                    </a:lnR>
+                    <a:lnT w="9525" cap="flat" cmpd="sng" algn="ctr">
+                      <a:solidFill>
+                        <a:srgbClr val="B9B4A6"/>
+                      </a:solidFill>
+                      <a:prstDash val="solid"/>
+                      <a:round/>
+                      <a:headEnd type="none" w="med" len="med"/>
+                      <a:tailEnd type="none" w="med" len="med"/>
+                    </a:lnT>
+                    <a:lnB w="9525" cap="flat" cmpd="sng" algn="ctr">
+                      <a:solidFill>
+                        <a:srgbClr val="B9B4A6"/>
+                      </a:solidFill>
+                      <a:prstDash val="solid"/>
+                      <a:round/>
+                      <a:headEnd type="none" w="med" len="med"/>
+                      <a:tailEnd type="none" w="med" len="med"/>
+                    </a:lnB>
+                  </a:tcPr>
+                </a:tc>
+              </a:tr>
+            </a:tbl>
+          </a:graphicData>
+        </a:graphic>
+      </p:graphicFrame>
+      <p:sp>
+        <p:nvSpPr>
+          <p:cNvPr id="9" name="캡처 안내"/>
+          <p:cNvSpPr txBox="1"/>
+          <p:nvPr/>
+        </p:nvSpPr>
+        <p:spPr>
+          <a:xfrm>
+            <a:off x="457200" y="3474720"/>
+            <a:ext cx="4114800" cy="274320"/>
+          </a:xfrm>
+          <a:prstGeom prst="rect">
+            <a:avLst/>
+          </a:prstGeom>
+          <a:noFill/>
+          <a:ln/>
+        </p:spPr>
+        <p:txBody>
+          <a:bodyPr wrap="square" lIns="0" tIns="0" rIns="0" bIns="0" rtlCol="0" anchor="ctr"/>
+          <a:lstStyle/>
+          <a:p>
+            <a:pPr indent="0" marL="0">
+              <a:buNone/>
+            </a:pPr>
+            <a:r>
+              <a:rPr lang="en-US" sz="1000" dirty="0">
+                <a:solidFill>
+                  <a:schemeClr val="accent3"/>
+                </a:solidFill>
+              </a:rPr>
+              <a:t>원자료 화면 캡처를 여기에 넣어도 됩니다 (삽입 → 그림)</a:t>
+            </a:r>
+            <a:endParaRPr lang="en-US" sz="1000" dirty="0"/>
+          </a:p>
+        </p:txBody>
+      </p:sp>
+      <p:sp>
+        <p:nvSpPr>
+          <p:cNvPr id="10" name="화살표"/>
+          <p:cNvSpPr txBox="1"/>
+          <p:nvPr/>
+        </p:nvSpPr>
+        <p:spPr>
+          <a:xfrm>
+            <a:off x="4572000" y="2651760"/>
+            <a:ext cx="365760" cy="457200"/>
+          </a:xfrm>
+          <a:prstGeom prst="rect">
+            <a:avLst/>
+          </a:prstGeom>
+          <a:noFill/>
+          <a:ln/>
+        </p:spPr>
+        <p:txBody>
+          <a:bodyPr wrap="square" lIns="0" tIns="0" rIns="0" bIns="0" rtlCol="0" anchor="t">
+            <a:normAutofit/>
+          </a:bodyPr>
+          <a:lstStyle/>
+          <a:p>
+            <a:pPr algn="ctr" indent="0" marL="0">
+              <a:buNone/>
+            </a:pPr>
+            <a:r>
+              <a:rPr lang="en-US" sz="2000" dirty="0">
+                <a:solidFill>
+                  <a:schemeClr val="accent1"/>
+                </a:solidFill>
+              </a:rPr>
+              <a:t>→</a:t>
+            </a:r>
+            <a:endParaRPr lang="en-US" sz="2000" dirty="0"/>
+          </a:p>
+        </p:txBody>
+      </p:sp>
+      <p:sp>
+        <p:nvSpPr>
+          <p:cNvPr id="11" name="가공표 라벨"/>
+          <p:cNvSpPr txBox="1"/>
+          <p:nvPr/>
+        </p:nvSpPr>
+        <p:spPr>
+          <a:xfrm>
+            <a:off x="5029200" y="1920240"/>
+            <a:ext cx="3657600" cy="274320"/>
+          </a:xfrm>
+          <a:prstGeom prst="rect">
+            <a:avLst/>
+          </a:prstGeom>
+          <a:noFill/>
+          <a:ln/>
+        </p:spPr>
+        <p:txBody>
+          <a:bodyPr wrap="square" lIns="0" tIns="0" rIns="0" bIns="0" rtlCol="0" anchor="ctr"/>
+          <a:lstStyle/>
+          <a:p>
+            <a:pPr indent="0" marL="0">
+              <a:buNone/>
+            </a:pPr>
+            <a:r>
+              <a:rPr lang="en-US" sz="1100" b="1" dirty="0">
+                <a:solidFill>
+                  <a:schemeClr val="tx2"/>
+                </a:solidFill>
+              </a:rPr>
+              <a:t>내가 다시 만든 표 · 단위: [  ]</a:t>
+            </a:r>
+            <a:endParaRPr lang="en-US" sz="1100" dirty="0"/>
+          </a:p>
+        </p:txBody>
+      </p:sp>
+      <p:graphicFrame>
+        <p:nvGraphicFramePr>
+          <p:cNvPr id="5" name="내가 만든 표"/>
+          <p:cNvGraphicFramePr>
+            <a:graphicFrameLocks noGrp="1"/>
+          </p:cNvGraphicFramePr>
+          <p:nvPr>
+            <p:extLst>
+              <p:ext uri="{D42A27DB-BD31-4B8C-83A1-F6EECF244321}">
+                <p14:modId xmlns:p14="http://schemas.microsoft.com/office/powerpoint/2010/main" val="1579011935"/>
+              </p:ext>
+            </p:extLst>
+          </p:nvPr>
+        </p:nvGraphicFramePr>
+        <p:xfrm>
+          <a:off x="5029200" y="2212848"/>
+          <a:ext cx="3657600" cy="914400"/>
+        </p:xfrm>
+        <a:graphic>
+          <a:graphicData uri="http://schemas.openxmlformats.org/drawingml/2006/table">
+            <a:tbl>
+              <a:tblPr/>
+              <a:tblGrid>
+                <a:gridCol w="1280160"/>
+                <a:gridCol w="1188720"/>
+                <a:gridCol w="1188720"/>
+              </a:tblGrid>
+              <a:tr h="292608">
+                <a:tc>
+                  <a:txBody>
+                    <a:bodyPr/>
+                    <a:lstStyle/>
+                    <a:p>
+                      <a:pPr algn="ctr" indent="0" marL="0">
+                        <a:buNone/>
+                      </a:pPr>
+                      <a:r>
+                        <a:rPr lang="en-US" sz="1000" b="1" dirty="0">
+                          <a:solidFill>
+                            <a:srgbClr val="1B211D"/>
+                          </a:solidFill>
+                        </a:rPr>
+                        <a:t>구분</a:t>
+                      </a:r>
+                      <a:endParaRPr lang="en-US" sz="1000" dirty="0"/>
+                    </a:p>
+                  </a:txBody>
+                  <a:tcPr marL="27432" marR="27432" marT="27432" marB="27432" anchor="ctr">
+                    <a:lnL w="9525" cap="flat" cmpd="sng" algn="ctr">
+                      <a:solidFill>
+                        <a:srgbClr val="B9B4A6"/>
+                      </a:solidFill>
+                      <a:prstDash val="solid"/>
+                      <a:round/>
+                      <a:headEnd type="none" w="med" len="med"/>
+                      <a:tailEnd type="none" w="med" len="med"/>
+                    </a:lnL>
+                    <a:lnR w="9525" cap="flat" cmpd="sng" algn="ctr">
+                      <a:solidFill>
+                        <a:srgbClr val="B9B4A6"/>
+                      </a:solidFill>
+                      <a:prstDash val="solid"/>
+                      <a:round/>
+                      <a:headEnd type="none" w="med" len="med"/>
+                      <a:tailEnd type="none" w="med" len="med"/>
+                    </a:lnR>
+                    <a:lnT w="9525" cap="flat" cmpd="sng" algn="ctr">
+                      <a:solidFill>
+                        <a:srgbClr val="B9B4A6"/>
+                      </a:solidFill>
+                      <a:prstDash val="solid"/>
+                      <a:round/>
+                      <a:headEnd type="none" w="med" len="med"/>
+                      <a:tailEnd type="none" w="med" len="med"/>
+                    </a:lnT>
+                    <a:lnB w="9525" cap="flat" cmpd="sng" algn="ctr">
+                      <a:solidFill>
+                        <a:srgbClr val="B9B4A6"/>
+                      </a:solidFill>
+                      <a:prstDash val="solid"/>
+                      <a:round/>
+                      <a:headEnd type="none" w="med" len="med"/>
+                      <a:tailEnd type="none" w="med" len="med"/>
+                    </a:lnB>
+                    <a:solidFill>
+                      <a:srgbClr val="EEF3EF"/>
+                    </a:solidFill>
+                  </a:tcPr>
+                </a:tc>
+                <a:tc>
+                  <a:txBody>
+                    <a:bodyPr/>
+                    <a:lstStyle/>
+                    <a:p>
+                      <a:pPr algn="ctr" indent="0" marL="0">
+                        <a:buNone/>
+                      </a:pPr>
+                      <a:endParaRPr lang="en-US" sz="1000" dirty="0"/>
+                    </a:p>
+                  </a:txBody>
+                  <a:tcPr marL="27432" marR="27432" marT="27432" marB="27432" anchor="ctr">
+                    <a:lnL w="9525" cap="flat" cmpd="sng" algn="ctr">
+                      <a:solidFill>
+                        <a:srgbClr val="B9B4A6"/>
+                      </a:solidFill>
+                      <a:prstDash val="solid"/>
+                      <a:round/>
+                      <a:headEnd type="none" w="med" len="med"/>
+                      <a:tailEnd type="none" w="med" len="med"/>
+                    </a:lnL>
+                    <a:lnR w="9525" cap="flat" cmpd="sng" algn="ctr">
+                      <a:solidFill>
+                        <a:srgbClr val="B9B4A6"/>
+                      </a:solidFill>
+                      <a:prstDash val="solid"/>
+                      <a:round/>
+                      <a:headEnd type="none" w="med" len="med"/>
+                      <a:tailEnd type="none" w="med" len="med"/>
+                    </a:lnR>
+                    <a:lnT w="9525" cap="flat" cmpd="sng" algn="ctr">
+                      <a:solidFill>
+                        <a:srgbClr val="B9B4A6"/>
+                      </a:solidFill>
+                      <a:prstDash val="solid"/>
+                      <a:round/>
+                      <a:headEnd type="none" w="med" len="med"/>
+                      <a:tailEnd type="none" w="med" len="med"/>
+                    </a:lnT>
+                    <a:lnB w="9525" cap="flat" cmpd="sng" algn="ctr">
+                      <a:solidFill>
+                        <a:srgbClr val="B9B4A6"/>
+                      </a:solidFill>
+                      <a:prstDash val="solid"/>
+                      <a:round/>
+                      <a:headEnd type="none" w="med" len="med"/>
+                      <a:tailEnd type="none" w="med" len="med"/>
+                    </a:lnB>
+                    <a:solidFill>
+                      <a:srgbClr val="EEF3EF"/>
+                    </a:solidFill>
+                  </a:tcPr>
+                </a:tc>
+                <a:tc>
+                  <a:txBody>
+                    <a:bodyPr/>
+                    <a:lstStyle/>
+                    <a:p>
+                      <a:pPr algn="ctr" indent="0" marL="0">
+                        <a:buNone/>
+                      </a:pPr>
+                      <a:endParaRPr lang="en-US" sz="1000" dirty="0"/>
+                    </a:p>
+                  </a:txBody>
+                  <a:tcPr marL="27432" marR="27432" marT="27432" marB="27432" anchor="ctr">
+                    <a:lnL w="9525" cap="flat" cmpd="sng" algn="ctr">
+                      <a:solidFill>
+                        <a:srgbClr val="B9B4A6"/>
+                      </a:solidFill>
+                      <a:prstDash val="solid"/>
+                      <a:round/>
+                      <a:headEnd type="none" w="med" len="med"/>
+                      <a:tailEnd type="none" w="med" len="med"/>
+                    </a:lnL>
+                    <a:lnR w="9525" cap="flat" cmpd="sng" algn="ctr">
+                      <a:solidFill>
+                        <a:srgbClr val="B9B4A6"/>
+                      </a:solidFill>
+                      <a:prstDash val="solid"/>
+                      <a:round/>
+                      <a:headEnd type="none" w="med" len="med"/>
+                      <a:tailEnd type="none" w="med" len="med"/>
+                    </a:lnR>
+                    <a:lnT w="9525" cap="flat" cmpd="sng" algn="ctr">
+                      <a:solidFill>
+                        <a:srgbClr val="B9B4A6"/>
+                      </a:solidFill>
+                      <a:prstDash val="solid"/>
+                      <a:round/>
+                      <a:headEnd type="none" w="med" len="med"/>
+                      <a:tailEnd type="none" w="med" len="med"/>
+                    </a:lnT>
+                    <a:lnB w="9525" cap="flat" cmpd="sng" algn="ctr">
+                      <a:solidFill>
+                        <a:srgbClr val="B9B4A6"/>
+                      </a:solidFill>
+                      <a:prstDash val="solid"/>
+                      <a:round/>
+                      <a:headEnd type="none" w="med" len="med"/>
+                      <a:tailEnd type="none" w="med" len="med"/>
+                    </a:lnB>
+                    <a:solidFill>
+                      <a:srgbClr val="EEF3EF"/>
+                    </a:solidFill>
+                  </a:tcPr>
+                </a:tc>
+              </a:tr>
+              <a:tr h="292608">
+                <a:tc>
+                  <a:txBody>
+                    <a:bodyPr/>
+                    <a:lstStyle/>
+                    <a:p>
+                      <a:pPr algn="ctr" indent="0" marL="0">
+                        <a:buNone/>
+                      </a:pPr>
+                      <a:endParaRPr lang="en-US" sz="1000" dirty="0"/>
+                    </a:p>
+                  </a:txBody>
+                  <a:tcPr marL="27432" marR="27432" marT="27432" marB="27432" anchor="ctr">
                     <a:lnL w="9525" cap="flat" cmpd="sng" algn="ctr">
                       <a:solidFill>
                         <a:srgbClr val="B9B4A6"/>
@@ -2991,10 +3461,516 @@
                       <a:pPr algn="ctr" indent="0" marL="0">
                         <a:buNone/>
                       </a:pPr>
-                      <a:endParaRPr lang="en-US" sz="1200" dirty="0"/>
+                      <a:endParaRPr lang="en-US" sz="1000" dirty="0"/>
                     </a:p>
                   </a:txBody>
-                  <a:tcPr marL="91440" marR="91440" marT="45720" marB="45720" anchor="ctr">
+                  <a:tcPr marL="27432" marR="27432" marT="27432" marB="27432" anchor="ctr">
+                    <a:lnL w="9525" cap="flat" cmpd="sng" algn="ctr">
+                      <a:solidFill>
+                        <a:srgbClr val="B9B4A6"/>
+                      </a:solidFill>
+                      <a:prstDash val="solid"/>
+                      <a:round/>
+                      <a:headEnd type="none" w="med" len="med"/>
+                      <a:tailEnd type="none" w="med" len="med"/>
+                    </a:lnL>
+                    <a:lnR w="9525" cap="flat" cmpd="sng" algn="ctr">
+                      <a:solidFill>
+                        <a:srgbClr val="B9B4A6"/>
+                      </a:solidFill>
+                      <a:prstDash val="solid"/>
+                      <a:round/>
+                      <a:headEnd type="none" w="med" len="med"/>
+                      <a:tailEnd type="none" w="med" len="med"/>
+                    </a:lnR>
+                    <a:lnT w="9525" cap="flat" cmpd="sng" algn="ctr">
+                      <a:solidFill>
+                        <a:srgbClr val="B9B4A6"/>
+                      </a:solidFill>
+                      <a:prstDash val="solid"/>
+                      <a:round/>
+                      <a:headEnd type="none" w="med" len="med"/>
+                      <a:tailEnd type="none" w="med" len="med"/>
+                    </a:lnT>
+                    <a:lnB w="9525" cap="flat" cmpd="sng" algn="ctr">
+                      <a:solidFill>
+                        <a:srgbClr val="B9B4A6"/>
+                      </a:solidFill>
+                      <a:prstDash val="solid"/>
+                      <a:round/>
+                      <a:headEnd type="none" w="med" len="med"/>
+                      <a:tailEnd type="none" w="med" len="med"/>
+                    </a:lnB>
+                  </a:tcPr>
+                </a:tc>
+                <a:tc>
+                  <a:txBody>
+                    <a:bodyPr/>
+                    <a:lstStyle/>
+                    <a:p>
+                      <a:pPr algn="ctr" indent="0" marL="0">
+                        <a:buNone/>
+                      </a:pPr>
+                      <a:endParaRPr lang="en-US" sz="1000" dirty="0"/>
+                    </a:p>
+                  </a:txBody>
+                  <a:tcPr marL="27432" marR="27432" marT="27432" marB="27432" anchor="ctr">
+                    <a:lnL w="9525" cap="flat" cmpd="sng" algn="ctr">
+                      <a:solidFill>
+                        <a:srgbClr val="B9B4A6"/>
+                      </a:solidFill>
+                      <a:prstDash val="solid"/>
+                      <a:round/>
+                      <a:headEnd type="none" w="med" len="med"/>
+                      <a:tailEnd type="none" w="med" len="med"/>
+                    </a:lnL>
+                    <a:lnR w="9525" cap="flat" cmpd="sng" algn="ctr">
+                      <a:solidFill>
+                        <a:srgbClr val="B9B4A6"/>
+                      </a:solidFill>
+                      <a:prstDash val="solid"/>
+                      <a:round/>
+                      <a:headEnd type="none" w="med" len="med"/>
+                      <a:tailEnd type="none" w="med" len="med"/>
+                    </a:lnR>
+                    <a:lnT w="9525" cap="flat" cmpd="sng" algn="ctr">
+                      <a:solidFill>
+                        <a:srgbClr val="B9B4A6"/>
+                      </a:solidFill>
+                      <a:prstDash val="solid"/>
+                      <a:round/>
+                      <a:headEnd type="none" w="med" len="med"/>
+                      <a:tailEnd type="none" w="med" len="med"/>
+                    </a:lnT>
+                    <a:lnB w="9525" cap="flat" cmpd="sng" algn="ctr">
+                      <a:solidFill>
+                        <a:srgbClr val="B9B4A6"/>
+                      </a:solidFill>
+                      <a:prstDash val="solid"/>
+                      <a:round/>
+                      <a:headEnd type="none" w="med" len="med"/>
+                      <a:tailEnd type="none" w="med" len="med"/>
+                    </a:lnB>
+                  </a:tcPr>
+                </a:tc>
+              </a:tr>
+              <a:tr h="292608">
+                <a:tc>
+                  <a:txBody>
+                    <a:bodyPr/>
+                    <a:lstStyle/>
+                    <a:p>
+                      <a:pPr algn="ctr" indent="0" marL="0">
+                        <a:buNone/>
+                      </a:pPr>
+                      <a:endParaRPr lang="en-US" sz="1000" dirty="0"/>
+                    </a:p>
+                  </a:txBody>
+                  <a:tcPr marL="27432" marR="27432" marT="27432" marB="27432" anchor="ctr">
+                    <a:lnL w="9525" cap="flat" cmpd="sng" algn="ctr">
+                      <a:solidFill>
+                        <a:srgbClr val="B9B4A6"/>
+                      </a:solidFill>
+                      <a:prstDash val="solid"/>
+                      <a:round/>
+                      <a:headEnd type="none" w="med" len="med"/>
+                      <a:tailEnd type="none" w="med" len="med"/>
+                    </a:lnL>
+                    <a:lnR w="9525" cap="flat" cmpd="sng" algn="ctr">
+                      <a:solidFill>
+                        <a:srgbClr val="B9B4A6"/>
+                      </a:solidFill>
+                      <a:prstDash val="solid"/>
+                      <a:round/>
+                      <a:headEnd type="none" w="med" len="med"/>
+                      <a:tailEnd type="none" w="med" len="med"/>
+                    </a:lnR>
+                    <a:lnT w="9525" cap="flat" cmpd="sng" algn="ctr">
+                      <a:solidFill>
+                        <a:srgbClr val="B9B4A6"/>
+                      </a:solidFill>
+                      <a:prstDash val="solid"/>
+                      <a:round/>
+                      <a:headEnd type="none" w="med" len="med"/>
+                      <a:tailEnd type="none" w="med" len="med"/>
+                    </a:lnT>
+                    <a:lnB w="9525" cap="flat" cmpd="sng" algn="ctr">
+                      <a:solidFill>
+                        <a:srgbClr val="B9B4A6"/>
+                      </a:solidFill>
+                      <a:prstDash val="solid"/>
+                      <a:round/>
+                      <a:headEnd type="none" w="med" len="med"/>
+                      <a:tailEnd type="none" w="med" len="med"/>
+                    </a:lnB>
+                  </a:tcPr>
+                </a:tc>
+                <a:tc>
+                  <a:txBody>
+                    <a:bodyPr/>
+                    <a:lstStyle/>
+                    <a:p>
+                      <a:pPr algn="ctr" indent="0" marL="0">
+                        <a:buNone/>
+                      </a:pPr>
+                      <a:endParaRPr lang="en-US" sz="1000" dirty="0"/>
+                    </a:p>
+                  </a:txBody>
+                  <a:tcPr marL="27432" marR="27432" marT="27432" marB="27432" anchor="ctr">
+                    <a:lnL w="9525" cap="flat" cmpd="sng" algn="ctr">
+                      <a:solidFill>
+                        <a:srgbClr val="B9B4A6"/>
+                      </a:solidFill>
+                      <a:prstDash val="solid"/>
+                      <a:round/>
+                      <a:headEnd type="none" w="med" len="med"/>
+                      <a:tailEnd type="none" w="med" len="med"/>
+                    </a:lnL>
+                    <a:lnR w="9525" cap="flat" cmpd="sng" algn="ctr">
+                      <a:solidFill>
+                        <a:srgbClr val="B9B4A6"/>
+                      </a:solidFill>
+                      <a:prstDash val="solid"/>
+                      <a:round/>
+                      <a:headEnd type="none" w="med" len="med"/>
+                      <a:tailEnd type="none" w="med" len="med"/>
+                    </a:lnR>
+                    <a:lnT w="9525" cap="flat" cmpd="sng" algn="ctr">
+                      <a:solidFill>
+                        <a:srgbClr val="B9B4A6"/>
+                      </a:solidFill>
+                      <a:prstDash val="solid"/>
+                      <a:round/>
+                      <a:headEnd type="none" w="med" len="med"/>
+                      <a:tailEnd type="none" w="med" len="med"/>
+                    </a:lnT>
+                    <a:lnB w="9525" cap="flat" cmpd="sng" algn="ctr">
+                      <a:solidFill>
+                        <a:srgbClr val="B9B4A6"/>
+                      </a:solidFill>
+                      <a:prstDash val="solid"/>
+                      <a:round/>
+                      <a:headEnd type="none" w="med" len="med"/>
+                      <a:tailEnd type="none" w="med" len="med"/>
+                    </a:lnB>
+                  </a:tcPr>
+                </a:tc>
+                <a:tc>
+                  <a:txBody>
+                    <a:bodyPr/>
+                    <a:lstStyle/>
+                    <a:p>
+                      <a:pPr algn="ctr" indent="0" marL="0">
+                        <a:buNone/>
+                      </a:pPr>
+                      <a:endParaRPr lang="en-US" sz="1000" dirty="0"/>
+                    </a:p>
+                  </a:txBody>
+                  <a:tcPr marL="27432" marR="27432" marT="27432" marB="27432" anchor="ctr">
+                    <a:lnL w="9525" cap="flat" cmpd="sng" algn="ctr">
+                      <a:solidFill>
+                        <a:srgbClr val="B9B4A6"/>
+                      </a:solidFill>
+                      <a:prstDash val="solid"/>
+                      <a:round/>
+                      <a:headEnd type="none" w="med" len="med"/>
+                      <a:tailEnd type="none" w="med" len="med"/>
+                    </a:lnL>
+                    <a:lnR w="9525" cap="flat" cmpd="sng" algn="ctr">
+                      <a:solidFill>
+                        <a:srgbClr val="B9B4A6"/>
+                      </a:solidFill>
+                      <a:prstDash val="solid"/>
+                      <a:round/>
+                      <a:headEnd type="none" w="med" len="med"/>
+                      <a:tailEnd type="none" w="med" len="med"/>
+                    </a:lnR>
+                    <a:lnT w="9525" cap="flat" cmpd="sng" algn="ctr">
+                      <a:solidFill>
+                        <a:srgbClr val="B9B4A6"/>
+                      </a:solidFill>
+                      <a:prstDash val="solid"/>
+                      <a:round/>
+                      <a:headEnd type="none" w="med" len="med"/>
+                      <a:tailEnd type="none" w="med" len="med"/>
+                    </a:lnT>
+                    <a:lnB w="9525" cap="flat" cmpd="sng" algn="ctr">
+                      <a:solidFill>
+                        <a:srgbClr val="B9B4A6"/>
+                      </a:solidFill>
+                      <a:prstDash val="solid"/>
+                      <a:round/>
+                      <a:headEnd type="none" w="med" len="med"/>
+                      <a:tailEnd type="none" w="med" len="med"/>
+                    </a:lnB>
+                  </a:tcPr>
+                </a:tc>
+              </a:tr>
+              <a:tr h="292608">
+                <a:tc>
+                  <a:txBody>
+                    <a:bodyPr/>
+                    <a:lstStyle/>
+                    <a:p>
+                      <a:pPr algn="ctr" indent="0" marL="0">
+                        <a:buNone/>
+                      </a:pPr>
+                      <a:endParaRPr lang="en-US" sz="1000" dirty="0"/>
+                    </a:p>
+                  </a:txBody>
+                  <a:tcPr marL="27432" marR="27432" marT="27432" marB="27432" anchor="ctr">
+                    <a:lnL w="9525" cap="flat" cmpd="sng" algn="ctr">
+                      <a:solidFill>
+                        <a:srgbClr val="B9B4A6"/>
+                      </a:solidFill>
+                      <a:prstDash val="solid"/>
+                      <a:round/>
+                      <a:headEnd type="none" w="med" len="med"/>
+                      <a:tailEnd type="none" w="med" len="med"/>
+                    </a:lnL>
+                    <a:lnR w="9525" cap="flat" cmpd="sng" algn="ctr">
+                      <a:solidFill>
+                        <a:srgbClr val="B9B4A6"/>
+                      </a:solidFill>
+                      <a:prstDash val="solid"/>
+                      <a:round/>
+                      <a:headEnd type="none" w="med" len="med"/>
+                      <a:tailEnd type="none" w="med" len="med"/>
+                    </a:lnR>
+                    <a:lnT w="9525" cap="flat" cmpd="sng" algn="ctr">
+                      <a:solidFill>
+                        <a:srgbClr val="B9B4A6"/>
+                      </a:solidFill>
+                      <a:prstDash val="solid"/>
+                      <a:round/>
+                      <a:headEnd type="none" w="med" len="med"/>
+                      <a:tailEnd type="none" w="med" len="med"/>
+                    </a:lnT>
+                    <a:lnB w="9525" cap="flat" cmpd="sng" algn="ctr">
+                      <a:solidFill>
+                        <a:srgbClr val="B9B4A6"/>
+                      </a:solidFill>
+                      <a:prstDash val="solid"/>
+                      <a:round/>
+                      <a:headEnd type="none" w="med" len="med"/>
+                      <a:tailEnd type="none" w="med" len="med"/>
+                    </a:lnB>
+                  </a:tcPr>
+                </a:tc>
+                <a:tc>
+                  <a:txBody>
+                    <a:bodyPr/>
+                    <a:lstStyle/>
+                    <a:p>
+                      <a:pPr algn="ctr" indent="0" marL="0">
+                        <a:buNone/>
+                      </a:pPr>
+                      <a:endParaRPr lang="en-US" sz="1000" dirty="0"/>
+                    </a:p>
+                  </a:txBody>
+                  <a:tcPr marL="27432" marR="27432" marT="27432" marB="27432" anchor="ctr">
+                    <a:lnL w="9525" cap="flat" cmpd="sng" algn="ctr">
+                      <a:solidFill>
+                        <a:srgbClr val="B9B4A6"/>
+                      </a:solidFill>
+                      <a:prstDash val="solid"/>
+                      <a:round/>
+                      <a:headEnd type="none" w="med" len="med"/>
+                      <a:tailEnd type="none" w="med" len="med"/>
+                    </a:lnL>
+                    <a:lnR w="9525" cap="flat" cmpd="sng" algn="ctr">
+                      <a:solidFill>
+                        <a:srgbClr val="B9B4A6"/>
+                      </a:solidFill>
+                      <a:prstDash val="solid"/>
+                      <a:round/>
+                      <a:headEnd type="none" w="med" len="med"/>
+                      <a:tailEnd type="none" w="med" len="med"/>
+                    </a:lnR>
+                    <a:lnT w="9525" cap="flat" cmpd="sng" algn="ctr">
+                      <a:solidFill>
+                        <a:srgbClr val="B9B4A6"/>
+                      </a:solidFill>
+                      <a:prstDash val="solid"/>
+                      <a:round/>
+                      <a:headEnd type="none" w="med" len="med"/>
+                      <a:tailEnd type="none" w="med" len="med"/>
+                    </a:lnT>
+                    <a:lnB w="9525" cap="flat" cmpd="sng" algn="ctr">
+                      <a:solidFill>
+                        <a:srgbClr val="B9B4A6"/>
+                      </a:solidFill>
+                      <a:prstDash val="solid"/>
+                      <a:round/>
+                      <a:headEnd type="none" w="med" len="med"/>
+                      <a:tailEnd type="none" w="med" len="med"/>
+                    </a:lnB>
+                  </a:tcPr>
+                </a:tc>
+                <a:tc>
+                  <a:txBody>
+                    <a:bodyPr/>
+                    <a:lstStyle/>
+                    <a:p>
+                      <a:pPr algn="ctr" indent="0" marL="0">
+                        <a:buNone/>
+                      </a:pPr>
+                      <a:endParaRPr lang="en-US" sz="1000" dirty="0"/>
+                    </a:p>
+                  </a:txBody>
+                  <a:tcPr marL="27432" marR="27432" marT="27432" marB="27432" anchor="ctr">
+                    <a:lnL w="9525" cap="flat" cmpd="sng" algn="ctr">
+                      <a:solidFill>
+                        <a:srgbClr val="B9B4A6"/>
+                      </a:solidFill>
+                      <a:prstDash val="solid"/>
+                      <a:round/>
+                      <a:headEnd type="none" w="med" len="med"/>
+                      <a:tailEnd type="none" w="med" len="med"/>
+                    </a:lnL>
+                    <a:lnR w="9525" cap="flat" cmpd="sng" algn="ctr">
+                      <a:solidFill>
+                        <a:srgbClr val="B9B4A6"/>
+                      </a:solidFill>
+                      <a:prstDash val="solid"/>
+                      <a:round/>
+                      <a:headEnd type="none" w="med" len="med"/>
+                      <a:tailEnd type="none" w="med" len="med"/>
+                    </a:lnR>
+                    <a:lnT w="9525" cap="flat" cmpd="sng" algn="ctr">
+                      <a:solidFill>
+                        <a:srgbClr val="B9B4A6"/>
+                      </a:solidFill>
+                      <a:prstDash val="solid"/>
+                      <a:round/>
+                      <a:headEnd type="none" w="med" len="med"/>
+                      <a:tailEnd type="none" w="med" len="med"/>
+                    </a:lnT>
+                    <a:lnB w="9525" cap="flat" cmpd="sng" algn="ctr">
+                      <a:solidFill>
+                        <a:srgbClr val="B9B4A6"/>
+                      </a:solidFill>
+                      <a:prstDash val="solid"/>
+                      <a:round/>
+                      <a:headEnd type="none" w="med" len="med"/>
+                      <a:tailEnd type="none" w="med" len="med"/>
+                    </a:lnB>
+                  </a:tcPr>
+                </a:tc>
+              </a:tr>
+              <a:tr h="292608">
+                <a:tc>
+                  <a:txBody>
+                    <a:bodyPr/>
+                    <a:lstStyle/>
+                    <a:p>
+                      <a:pPr algn="ctr" indent="0" marL="0">
+                        <a:buNone/>
+                      </a:pPr>
+                      <a:endParaRPr lang="en-US" sz="1000" dirty="0"/>
+                    </a:p>
+                  </a:txBody>
+                  <a:tcPr marL="27432" marR="27432" marT="27432" marB="27432" anchor="ctr">
+                    <a:lnL w="9525" cap="flat" cmpd="sng" algn="ctr">
+                      <a:solidFill>
+                        <a:srgbClr val="B9B4A6"/>
+                      </a:solidFill>
+                      <a:prstDash val="solid"/>
+                      <a:round/>
+                      <a:headEnd type="none" w="med" len="med"/>
+                      <a:tailEnd type="none" w="med" len="med"/>
+                    </a:lnL>
+                    <a:lnR w="9525" cap="flat" cmpd="sng" algn="ctr">
+                      <a:solidFill>
+                        <a:srgbClr val="B9B4A6"/>
+                      </a:solidFill>
+                      <a:prstDash val="solid"/>
+                      <a:round/>
+                      <a:headEnd type="none" w="med" len="med"/>
+                      <a:tailEnd type="none" w="med" len="med"/>
+                    </a:lnR>
+                    <a:lnT w="9525" cap="flat" cmpd="sng" algn="ctr">
+                      <a:solidFill>
+                        <a:srgbClr val="B9B4A6"/>
+                      </a:solidFill>
+                      <a:prstDash val="solid"/>
+                      <a:round/>
+                      <a:headEnd type="none" w="med" len="med"/>
+                      <a:tailEnd type="none" w="med" len="med"/>
+                    </a:lnT>
+                    <a:lnB w="9525" cap="flat" cmpd="sng" algn="ctr">
+                      <a:solidFill>
+                        <a:srgbClr val="B9B4A6"/>
+                      </a:solidFill>
+                      <a:prstDash val="solid"/>
+                      <a:round/>
+                      <a:headEnd type="none" w="med" len="med"/>
+                      <a:tailEnd type="none" w="med" len="med"/>
+                    </a:lnB>
+                  </a:tcPr>
+                </a:tc>
+                <a:tc>
+                  <a:txBody>
+                    <a:bodyPr/>
+                    <a:lstStyle/>
+                    <a:p>
+                      <a:pPr algn="ctr" indent="0" marL="0">
+                        <a:buNone/>
+                      </a:pPr>
+                      <a:endParaRPr lang="en-US" sz="1000" dirty="0"/>
+                    </a:p>
+                  </a:txBody>
+                  <a:tcPr marL="27432" marR="27432" marT="27432" marB="27432" anchor="ctr">
+                    <a:lnL w="9525" cap="flat" cmpd="sng" algn="ctr">
+                      <a:solidFill>
+                        <a:srgbClr val="B9B4A6"/>
+                      </a:solidFill>
+                      <a:prstDash val="solid"/>
+                      <a:round/>
+                      <a:headEnd type="none" w="med" len="med"/>
+                      <a:tailEnd type="none" w="med" len="med"/>
+                    </a:lnL>
+                    <a:lnR w="9525" cap="flat" cmpd="sng" algn="ctr">
+                      <a:solidFill>
+                        <a:srgbClr val="B9B4A6"/>
+                      </a:solidFill>
+                      <a:prstDash val="solid"/>
+                      <a:round/>
+                      <a:headEnd type="none" w="med" len="med"/>
+                      <a:tailEnd type="none" w="med" len="med"/>
+                    </a:lnR>
+                    <a:lnT w="9525" cap="flat" cmpd="sng" algn="ctr">
+                      <a:solidFill>
+                        <a:srgbClr val="B9B4A6"/>
+                      </a:solidFill>
+                      <a:prstDash val="solid"/>
+                      <a:round/>
+                      <a:headEnd type="none" w="med" len="med"/>
+                      <a:tailEnd type="none" w="med" len="med"/>
+                    </a:lnT>
+                    <a:lnB w="9525" cap="flat" cmpd="sng" algn="ctr">
+                      <a:solidFill>
+                        <a:srgbClr val="B9B4A6"/>
+                      </a:solidFill>
+                      <a:prstDash val="solid"/>
+                      <a:round/>
+                      <a:headEnd type="none" w="med" len="med"/>
+                      <a:tailEnd type="none" w="med" len="med"/>
+                    </a:lnB>
+                  </a:tcPr>
+                </a:tc>
+                <a:tc>
+                  <a:txBody>
+                    <a:bodyPr/>
+                    <a:lstStyle/>
+                    <a:p>
+                      <a:pPr algn="ctr" indent="0" marL="0">
+                        <a:buNone/>
+                      </a:pPr>
+                      <a:endParaRPr lang="en-US" sz="1000" dirty="0"/>
+                    </a:p>
+                  </a:txBody>
+                  <a:tcPr marL="27432" marR="27432" marT="27432" marB="27432" anchor="ctr">
                     <a:lnL w="9525" cap="flat" cmpd="sng" algn="ctr">
                       <a:solidFill>
                         <a:srgbClr val="B9B4A6"/>
@@ -3040,39 +4016,14 @@
       </p:graphicFrame>
       <p:sp>
         <p:nvSpPr>
-          <p:cNvPr id="9" name="원자료 캡처 자리"/>
-          <p:cNvSpPr/>
-          <p:nvPr/>
-        </p:nvSpPr>
-        <p:spPr>
-          <a:xfrm>
-            <a:off x="4846320" y="1005840"/>
-            <a:ext cx="3840480" cy="3474720"/>
-          </a:xfrm>
-          <a:prstGeom prst="rect">
-            <a:avLst/>
-          </a:prstGeom>
-          <a:solidFill>
-            <a:srgbClr val="FFFFFF"/>
-          </a:solidFill>
-          <a:ln w="12700">
-            <a:solidFill>
-              <a:schemeClr val="accent4"/>
-            </a:solidFill>
-            <a:prstDash val="dash"/>
-          </a:ln>
-        </p:spPr>
-      </p:sp>
-      <p:sp>
-        <p:nvSpPr>
-          <p:cNvPr id="10" name="원자료 캡처 자리 안내"/>
+          <p:cNvPr id="13" name="가공 안내"/>
           <p:cNvSpPr txBox="1"/>
           <p:nvPr/>
         </p:nvSpPr>
         <p:spPr>
           <a:xfrm>
-            <a:off x="5029200" y="1188720"/>
-            <a:ext cx="3474720" cy="3108960"/>
+            <a:off x="5029200" y="3749040"/>
+            <a:ext cx="3657600" cy="457200"/>
           </a:xfrm>
           <a:prstGeom prst="rect">
             <a:avLst/>
@@ -3081,35 +4032,21 @@
           <a:ln/>
         </p:spPr>
         <p:txBody>
-          <a:bodyPr wrap="square" rtlCol="0" anchor="ctr"/>
+          <a:bodyPr wrap="square" lIns="0" tIns="0" rIns="0" bIns="0" rtlCol="0" anchor="ctr"/>
           <a:lstStyle/>
           <a:p>
-            <a:pPr algn="ctr" indent="0" marL="0">
+            <a:pPr indent="0" marL="0">
               <a:buNone/>
             </a:pPr>
             <a:r>
-              <a:rPr lang="en-US" sz="1300" dirty="0">
+              <a:rPr lang="en-US" sz="1000" dirty="0">
                 <a:solidFill>
                   <a:schemeClr val="accent3"/>
                 </a:solidFill>
               </a:rPr>
-              <a:t>원자료 화면 캡처를 여기에 넣습니다</a:t>
+              <a:t>필요한 행·열만 3~8개 골라 옮깁니다. 직접 계산한 열(차이, 비율)을 넣어도 됩니다.</a:t>
             </a:r>
-            <a:endParaRPr lang="en-US" sz="1300" dirty="0"/>
-          </a:p>
-          <a:p>
-            <a:pPr algn="ctr" indent="0" marL="0">
-              <a:buNone/>
-            </a:pPr>
-            <a:r>
-              <a:rPr lang="en-US" sz="1300" dirty="0">
-                <a:solidFill>
-                  <a:schemeClr val="accent3"/>
-                </a:solidFill>
-              </a:rPr>
-              <a:t>(삽입 → 그림. 넣은 뒤 이 글상자는 지웁니다)</a:t>
-            </a:r>
-            <a:endParaRPr lang="en-US" sz="1300" dirty="0"/>
+            <a:endParaRPr lang="en-US" sz="1000" dirty="0"/>
           </a:p>
         </p:txBody>
       </p:sp>
@@ -3290,8 +4227,8 @@
         </p:nvSpPr>
         <p:spPr>
           <a:xfrm>
-            <a:off x="457200" y="1005840"/>
-            <a:ext cx="4572000" cy="3474720"/>
+            <a:off x="457200" y="960120"/>
+            <a:ext cx="8229600" cy="2011680"/>
           </a:xfrm>
           <a:prstGeom prst="rect">
             <a:avLst/>
@@ -3315,8 +4252,8 @@
         </p:nvSpPr>
         <p:spPr>
           <a:xfrm>
-            <a:off x="640080" y="1188720"/>
-            <a:ext cx="4206240" cy="3108960"/>
+            <a:off x="640080" y="1143000"/>
+            <a:ext cx="7863840" cy="1645920"/>
           </a:xfrm>
           <a:prstGeom prst="rect">
             <a:avLst/>
@@ -3337,41 +4274,7 @@
                   <a:schemeClr val="accent3"/>
                 </a:solidFill>
               </a:rPr>
-              <a:t>그래프 또는 확률분포표를 여기에 넣습니다</a:t>
-            </a:r>
-            <a:endParaRPr lang="en-US" sz="1300" dirty="0"/>
-          </a:p>
-          <a:p>
-            <a:pPr algn="ctr" indent="0" marL="0">
-              <a:buNone/>
-            </a:pPr>
-            <a:r>
-              <a:rPr lang="en-US" sz="1300" dirty="0">
-                <a:solidFill>
-                  <a:schemeClr val="accent3"/>
-                </a:solidFill>
-              </a:rPr>
-              <a:t>(삽입 → 차트, 또는 손으로 그린 것을 찍은 사진)</a:t>
-            </a:r>
-            <a:endParaRPr lang="en-US" sz="1300" dirty="0"/>
-          </a:p>
-          <a:p>
-            <a:pPr algn="ctr" indent="0" marL="0">
-              <a:buNone/>
-            </a:pPr>
-            <a:endParaRPr lang="en-US" sz="1300" dirty="0"/>
-          </a:p>
-          <a:p>
-            <a:pPr algn="ctr" indent="0" marL="0">
-              <a:buNone/>
-            </a:pPr>
-            <a:r>
-              <a:rPr lang="en-US" sz="1300" dirty="0">
-                <a:solidFill>
-                  <a:schemeClr val="accent3"/>
-                </a:solidFill>
-              </a:rPr>
-              <a:t>세로축은 0부터, 제목과 단위를 씁니다</a:t>
+              <a:t>그래프 또는 확률분포표를 여기에 넣습니다 (삽입 → 차트, 또는 손으로 그린 것을 찍은 사진). 세로축은 0부터, 제목과 단위를 씁니다</a:t>
             </a:r>
             <a:endParaRPr lang="en-US" sz="1300" dirty="0"/>
           </a:p>
@@ -3385,12 +4288,12 @@
         </p:nvSpPr>
         <p:spPr>
           <a:xfrm>
-            <a:off x="5303520" y="1005840"/>
-            <a:ext cx="3383280" cy="1051560"/>
+            <a:off x="457200" y="3108960"/>
+            <a:ext cx="2651760" cy="1417320"/>
           </a:xfrm>
           <a:prstGeom prst="roundRect">
             <a:avLst>
-              <a:gd name="adj" fmla="val 6957"/>
+              <a:gd name="adj" fmla="val 5161"/>
             </a:avLst>
           </a:prstGeom>
           <a:solidFill>
@@ -3412,8 +4315,8 @@
         </p:nvSpPr>
         <p:spPr>
           <a:xfrm>
-            <a:off x="5486400" y="1115568"/>
-            <a:ext cx="3017520" cy="274320"/>
+            <a:off x="621792" y="3200400"/>
+            <a:ext cx="2377440" cy="274320"/>
           </a:xfrm>
           <a:prstGeom prst="rect">
             <a:avLst/>
@@ -3429,14 +4332,14 @@
               <a:buNone/>
             </a:pPr>
             <a:r>
-              <a:rPr lang="en-US" sz="1100" b="1" dirty="0">
+              <a:rPr lang="en-US" sz="1050" b="1" dirty="0">
                 <a:solidFill>
                   <a:schemeClr val="tx2"/>
                 </a:solidFill>
               </a:rPr>
               <a:t>① 숫자로 말하기</a:t>
             </a:r>
-            <a:endParaRPr lang="en-US" sz="1100" dirty="0"/>
+            <a:endParaRPr lang="en-US" sz="1050" dirty="0"/>
           </a:p>
         </p:txBody>
       </p:sp>
@@ -3448,8 +4351,8 @@
         </p:nvSpPr>
         <p:spPr>
           <a:xfrm>
-            <a:off x="5486400" y="1417320"/>
-            <a:ext cx="3017520" cy="566928"/>
+            <a:off x="621792" y="3493008"/>
+            <a:ext cx="2377440" cy="960120"/>
           </a:xfrm>
           <a:prstGeom prst="rect">
             <a:avLst/>
@@ -3467,14 +4370,14 @@
               <a:buNone/>
             </a:pPr>
             <a:r>
-              <a:rPr lang="en-US" sz="1200" dirty="0">
+              <a:rPr lang="en-US" sz="1050" dirty="0">
                 <a:solidFill>
                   <a:schemeClr val="tx1"/>
                 </a:solidFill>
               </a:rPr>
               <a:t>[__년 __에서 __년 __으로 __만큼 늘었다/줄었다. 비율로는 약 __%]</a:t>
             </a:r>
-            <a:endParaRPr lang="en-US" sz="1200" dirty="0"/>
+            <a:endParaRPr lang="en-US" sz="1050" dirty="0"/>
           </a:p>
         </p:txBody>
       </p:sp>
@@ -3486,12 +4389,12 @@
         </p:nvSpPr>
         <p:spPr>
           <a:xfrm>
-            <a:off x="5303520" y="2194560"/>
-            <a:ext cx="3383280" cy="1051560"/>
+            <a:off x="3246120" y="3108960"/>
+            <a:ext cx="2651760" cy="1417320"/>
           </a:xfrm>
           <a:prstGeom prst="roundRect">
             <a:avLst>
-              <a:gd name="adj" fmla="val 6957"/>
+              <a:gd name="adj" fmla="val 5161"/>
             </a:avLst>
           </a:prstGeom>
           <a:solidFill>
@@ -3513,8 +4416,8 @@
         </p:nvSpPr>
         <p:spPr>
           <a:xfrm>
-            <a:off x="5486400" y="2304288"/>
-            <a:ext cx="3017520" cy="274320"/>
+            <a:off x="3410712" y="3200400"/>
+            <a:ext cx="2377440" cy="274320"/>
           </a:xfrm>
           <a:prstGeom prst="rect">
             <a:avLst/>
@@ -3530,14 +4433,14 @@
               <a:buNone/>
             </a:pPr>
             <a:r>
-              <a:rPr lang="en-US" sz="1100" b="1" dirty="0">
+              <a:rPr lang="en-US" sz="1050" b="1" dirty="0">
                 <a:solidFill>
                   <a:schemeClr val="tx2"/>
                 </a:solidFill>
               </a:rPr>
               <a:t>② 왜 그렇게 되었을까, 내 의견</a:t>
             </a:r>
-            <a:endParaRPr lang="en-US" sz="1100" dirty="0"/>
+            <a:endParaRPr lang="en-US" sz="1050" dirty="0"/>
           </a:p>
         </p:txBody>
       </p:sp>
@@ -3549,8 +4452,8 @@
         </p:nvSpPr>
         <p:spPr>
           <a:xfrm>
-            <a:off x="5486400" y="2606040"/>
-            <a:ext cx="3017520" cy="566928"/>
+            <a:off x="3410712" y="3493008"/>
+            <a:ext cx="2377440" cy="960120"/>
           </a:xfrm>
           <a:prstGeom prst="rect">
             <a:avLst/>
@@ -3568,14 +4471,14 @@
               <a:buNone/>
             </a:pPr>
             <a:r>
-              <a:rPr lang="en-US" sz="1200" dirty="0">
+              <a:rPr lang="en-US" sz="1050" dirty="0">
                 <a:solidFill>
                   <a:schemeClr val="tx1"/>
                 </a:solidFill>
               </a:rPr>
               <a:t>[한두 문장]</a:t>
             </a:r>
-            <a:endParaRPr lang="en-US" sz="1200" dirty="0"/>
+            <a:endParaRPr lang="en-US" sz="1050" dirty="0"/>
           </a:p>
         </p:txBody>
       </p:sp>
@@ -3587,12 +4490,12 @@
         </p:nvSpPr>
         <p:spPr>
           <a:xfrm>
-            <a:off x="5303520" y="3383280"/>
-            <a:ext cx="3383280" cy="1051560"/>
+            <a:off x="6035040" y="3108960"/>
+            <a:ext cx="2651760" cy="1417320"/>
           </a:xfrm>
           <a:prstGeom prst="roundRect">
             <a:avLst>
-              <a:gd name="adj" fmla="val 6957"/>
+              <a:gd name="adj" fmla="val 5161"/>
             </a:avLst>
           </a:prstGeom>
           <a:solidFill>
@@ -3614,8 +4517,8 @@
         </p:nvSpPr>
         <p:spPr>
           <a:xfrm>
-            <a:off x="5486400" y="3493008"/>
-            <a:ext cx="3017520" cy="274320"/>
+            <a:off x="6199632" y="3200400"/>
+            <a:ext cx="2377440" cy="274320"/>
           </a:xfrm>
           <a:prstGeom prst="rect">
             <a:avLst/>
@@ -3631,14 +4534,14 @@
               <a:buNone/>
             </a:pPr>
             <a:r>
-              <a:rPr lang="en-US" sz="1100" b="1" dirty="0">
+              <a:rPr lang="en-US" sz="1050" b="1" dirty="0">
                 <a:solidFill>
                   <a:schemeClr val="tx2"/>
                 </a:solidFill>
               </a:rPr>
               <a:t>③ 내 의견의 근거</a:t>
             </a:r>
-            <a:endParaRPr lang="en-US" sz="1100" dirty="0"/>
+            <a:endParaRPr lang="en-US" sz="1050" dirty="0"/>
           </a:p>
         </p:txBody>
       </p:sp>
@@ -3650,8 +4553,8 @@
         </p:nvSpPr>
         <p:spPr>
           <a:xfrm>
-            <a:off x="5486400" y="3794760"/>
-            <a:ext cx="3017520" cy="566928"/>
+            <a:off x="6199632" y="3493008"/>
+            <a:ext cx="2377440" cy="960120"/>
           </a:xfrm>
           <a:prstGeom prst="rect">
             <a:avLst/>
@@ -3669,14 +4572,14 @@
               <a:buNone/>
             </a:pPr>
             <a:r>
-              <a:rPr lang="en-US" sz="1200" dirty="0">
+              <a:rPr lang="en-US" sz="1050" dirty="0">
                 <a:solidFill>
                   <a:schemeClr val="tx1"/>
                 </a:solidFill>
               </a:rPr>
-              <a:t>[다른 통계 수치, 책 내용, 기사 등. 출처를 함께]</a:t>
+              <a:t>[다른 통계 수치, 책 내용 등. 출처를 함께]</a:t>
             </a:r>
-            <a:endParaRPr lang="en-US" sz="1200" dirty="0"/>
+            <a:endParaRPr lang="en-US" sz="1050" dirty="0"/>
           </a:p>
         </p:txBody>
       </p:sp>
@@ -4108,7 +5011,7 @@
                   <a:schemeClr val="tx2"/>
                 </a:solidFill>
               </a:rPr>
-              <a:t>제안 또는 남는 궁금증</a:t>
+              <a:t>제안</a:t>
             </a:r>
             <a:endParaRPr lang="en-US" sz="1100" dirty="0"/>
           </a:p>
@@ -4146,7 +5049,7 @@
                   <a:schemeClr val="tx1"/>
                 </a:solidFill>
               </a:rPr>
-              <a:t>[한 문장]</a:t>
+              <a:t>[무엇을 하자. 숫자를 넣으면 좋다]</a:t>
             </a:r>
             <a:endParaRPr lang="en-US" sz="1800" dirty="0"/>
           </a:p>

--- a/docs/2026-2학기-통계독서탐구-수행평가/발표틀.pptx
+++ b/docs/2026-2학기-통계독서탐구-수행평가/발표틀.pptx
@@ -110,7 +110,7 @@
   <p:extLst>
     <p:ext uri="{521415D9-36F7-43E2-AB2F-B90AF26B5E84}">
       <p14:sectionLst xmlns:p14="http://schemas.microsoft.com/office/powerpoint/2010/main">
-        <p14:section name="발표" id="{b7d465d2-3089-b4b7-15cc-729cc04a06c0}">
+        <p14:section name="발표" id="{dcc01dfb-a402-eaf7-f739-417cabf886de}">
           <p14:sldIdLst>
             <p14:sldId id="256"/>
             <p14:sldId id="257"/>

--- a/docs/2026-2학기-통계독서탐구-수행평가/발표틀.pptx
+++ b/docs/2026-2학기-통계독서탐구-수행평가/발표틀.pptx
@@ -110,7 +110,7 @@
   <p:extLst>
     <p:ext uri="{521415D9-36F7-43E2-AB2F-B90AF26B5E84}">
       <p14:sectionLst xmlns:p14="http://schemas.microsoft.com/office/powerpoint/2010/main">
-        <p14:section name="발표" id="{dcc01dfb-a402-eaf7-f739-417cabf886de}">
+        <p14:section name="발표" id="{810c5f7e-f3c6-1e52-2fe8-82754696c6de}">
           <p14:sldIdLst>
             <p14:sldId id="256"/>
             <p14:sldId id="257"/>
@@ -698,7 +698,7 @@
           <a:p>
             <a:r>
               <a:rPr lang="en-US" dirty="0"/>
-              <a:t>숫자로 얼마나 늘고 줄었는지, 왜 그렇다고 생각하는지, 근거는 무엇인지 말합니다.</a:t>
+              <a:t>숫자로 얼마나 늘고 줄었는지, 그것을 보고 어떤 의견이나 추측을 했는지, 근거는 무엇인지 말합니다.</a:t>
             </a:r>
             <a:endParaRPr lang="en-US" dirty="0"/>
           </a:p>
@@ -786,7 +786,7 @@
           <a:p>
             <a:r>
               <a:rPr lang="en-US" dirty="0"/>
-              <a:t>세 문장으로 마무리합니다. 발표가 끝나면 선생님 질문 하나에 답합니다.</a:t>
+              <a:t>세 부분으로 마무리합니다. 발표가 끝나면 선생님 질문 하나에 답합니다.</a:t>
             </a:r>
             <a:endParaRPr lang="en-US" dirty="0"/>
           </a:p>
@@ -1940,7 +1940,7 @@
                   <a:schemeClr val="tx1"/>
                 </a:solidFill>
               </a:rPr>
-              <a:t>이 책과 이어지는 내용: [한 줄]</a:t>
+              <a:t>이 책을 어떻게 썼나: [한 줄]</a:t>
             </a:r>
             <a:endParaRPr lang="en-US" sz="1300" dirty="0"/>
           </a:p>
@@ -2124,11 +2124,11 @@
         <p:spPr>
           <a:xfrm>
             <a:off x="457200" y="960120"/>
-            <a:ext cx="8229600" cy="868680"/>
+            <a:ext cx="8229600" cy="1051560"/>
           </a:xfrm>
           <a:prstGeom prst="roundRect">
             <a:avLst>
-              <a:gd name="adj" fmla="val 8421"/>
+              <a:gd name="adj" fmla="val 6957"/>
             </a:avLst>
           </a:prstGeom>
           <a:solidFill>
@@ -2150,8 +2150,8 @@
         </p:nvSpPr>
         <p:spPr>
           <a:xfrm>
-            <a:off x="640080" y="1051560"/>
-            <a:ext cx="7863840" cy="685800"/>
+            <a:off x="640080" y="1024128"/>
+            <a:ext cx="7863840" cy="914400"/>
           </a:xfrm>
           <a:prstGeom prst="rect">
             <a:avLst/>
@@ -2167,36 +2167,53 @@
           <a:p>
             <a:pPr indent="0" marL="0">
               <a:spcAft>
-                <a:spcPts val="300"/>
+                <a:spcPts val="200"/>
               </a:spcAft>
               <a:buNone/>
             </a:pPr>
             <a:r>
-              <a:rPr lang="en-US" sz="1200" dirty="0">
+              <a:rPr lang="en-US" sz="1150" dirty="0">
                 <a:solidFill>
                   <a:schemeClr val="tx1"/>
                 </a:solidFill>
               </a:rPr>
               <a:t>기관: [자료를 만든 기관]  ·  조사 이름: 「[조사 이름]」</a:t>
             </a:r>
-            <a:endParaRPr lang="en-US" sz="1200" dirty="0"/>
+            <a:endParaRPr lang="en-US" sz="1150" dirty="0"/>
           </a:p>
           <a:p>
             <a:pPr indent="0" marL="0">
               <a:spcAft>
-                <a:spcPts val="300"/>
+                <a:spcPts val="200"/>
               </a:spcAft>
               <a:buNone/>
             </a:pPr>
             <a:r>
-              <a:rPr lang="en-US" sz="1200" dirty="0">
+              <a:rPr lang="en-US" sz="1150" dirty="0">
                 <a:solidFill>
                   <a:schemeClr val="tx1"/>
                 </a:solidFill>
               </a:rPr>
               <a:t>대상: [누구를, 몇 명을]  ·  조사 방식: 모두 조사(전수) / 일부만 뽑아 조사(표본) ← 하나만 남깁니다</a:t>
             </a:r>
-            <a:endParaRPr lang="en-US" sz="1200" dirty="0"/>
+            <a:endParaRPr lang="en-US" sz="1150" dirty="0"/>
+          </a:p>
+          <a:p>
+            <a:pPr indent="0" marL="0">
+              <a:spcAft>
+                <a:spcPts val="200"/>
+              </a:spcAft>
+              <a:buNone/>
+            </a:pPr>
+            <a:r>
+              <a:rPr lang="en-US" sz="1150" dirty="0">
+                <a:solidFill>
+                  <a:schemeClr val="tx1"/>
+                </a:solidFill>
+              </a:rPr>
+              <a:t>얻는 길: [누리집 주소] → [메뉴] → [표 이름]</a:t>
+            </a:r>
+            <a:endParaRPr lang="en-US" sz="1150" dirty="0"/>
           </a:p>
         </p:txBody>
       </p:sp>
@@ -2208,7 +2225,7 @@
         </p:nvSpPr>
         <p:spPr>
           <a:xfrm>
-            <a:off x="457200" y="1920240"/>
+            <a:off x="457200" y="2103120"/>
             <a:ext cx="4114800" cy="274320"/>
           </a:xfrm>
           <a:prstGeom prst="rect">
@@ -2251,7 +2268,7 @@
           </p:nvPr>
         </p:nvGraphicFramePr>
         <p:xfrm>
-          <a:off x="457200" y="2212848"/>
+          <a:off x="457200" y="2395728"/>
           <a:ext cx="4114800" cy="914400"/>
         </p:xfrm>
         <a:graphic>
@@ -3104,7 +3121,7 @@
         </p:nvSpPr>
         <p:spPr>
           <a:xfrm>
-            <a:off x="457200" y="3474720"/>
+            <a:off x="457200" y="3657600"/>
             <a:ext cx="4114800" cy="274320"/>
           </a:xfrm>
           <a:prstGeom prst="rect">
@@ -3140,7 +3157,7 @@
         </p:nvSpPr>
         <p:spPr>
           <a:xfrm>
-            <a:off x="4572000" y="2651760"/>
+            <a:off x="4572000" y="2834640"/>
             <a:ext cx="365760" cy="457200"/>
           </a:xfrm>
           <a:prstGeom prst="rect">
@@ -3178,7 +3195,7 @@
         </p:nvSpPr>
         <p:spPr>
           <a:xfrm>
-            <a:off x="5029200" y="1920240"/>
+            <a:off x="5029200" y="2103120"/>
             <a:ext cx="3657600" cy="274320"/>
           </a:xfrm>
           <a:prstGeom prst="rect">
@@ -3221,7 +3238,7 @@
           </p:nvPr>
         </p:nvGraphicFramePr>
         <p:xfrm>
-          <a:off x="5029200" y="2212848"/>
+          <a:off x="5029200" y="2395728"/>
           <a:ext cx="3657600" cy="914400"/>
         </p:xfrm>
         <a:graphic>
@@ -4022,7 +4039,7 @@
         </p:nvSpPr>
         <p:spPr>
           <a:xfrm>
-            <a:off x="5029200" y="3749040"/>
+            <a:off x="5029200" y="3931920"/>
             <a:ext cx="3657600" cy="457200"/>
           </a:xfrm>
           <a:prstGeom prst="rect">
@@ -4274,7 +4291,7 @@
                   <a:schemeClr val="accent3"/>
                 </a:solidFill>
               </a:rPr>
-              <a:t>그래프 또는 확률분포표를 여기에 넣습니다 (삽입 → 차트, 또는 손으로 그린 것을 찍은 사진). 세로축은 0부터, 제목과 단위를 씁니다</a:t>
+              <a:t>그래프를 여기에 넣습니다 (삽입 → 차트, 또는 손으로 그린 것을 찍은 사진). 세로축은 0부터, 제목과 단위를 씁니다</a:t>
             </a:r>
             <a:endParaRPr lang="en-US" sz="1300" dirty="0"/>
           </a:p>
@@ -4438,7 +4455,7 @@
                   <a:schemeClr val="tx2"/>
                 </a:solidFill>
               </a:rPr>
-              <a:t>② 왜 그렇게 되었을까, 내 의견</a:t>
+              <a:t>② 의견 또는 추측</a:t>
             </a:r>
             <a:endParaRPr lang="en-US" sz="1050" dirty="0"/>
           </a:p>
@@ -4476,7 +4493,7 @@
                   <a:schemeClr val="tx1"/>
                 </a:solidFill>
               </a:rPr>
-              <a:t>[한두 문장]</a:t>
+              <a:t>[가공한 자료를 보고 든 생각, 앞으로 어떻게 될지]</a:t>
             </a:r>
             <a:endParaRPr lang="en-US" sz="1050" dirty="0"/>
           </a:p>
@@ -4539,7 +4556,7 @@
                   <a:schemeClr val="tx2"/>
                 </a:solidFill>
               </a:rPr>
-              <a:t>③ 내 의견의 근거</a:t>
+              <a:t>③ 의견·추측의 근거</a:t>
             </a:r>
             <a:endParaRPr lang="en-US" sz="1050" dirty="0"/>
           </a:p>
@@ -4760,12 +4777,12 @@
         </p:nvSpPr>
         <p:spPr>
           <a:xfrm>
-            <a:off x="457200" y="1005840"/>
-            <a:ext cx="8229600" cy="1051560"/>
+            <a:off x="457200" y="960120"/>
+            <a:ext cx="8229600" cy="1115568"/>
           </a:xfrm>
           <a:prstGeom prst="roundRect">
             <a:avLst>
-              <a:gd name="adj" fmla="val 6957"/>
+              <a:gd name="adj" fmla="val 6557"/>
             </a:avLst>
           </a:prstGeom>
           <a:solidFill>
@@ -4787,7 +4804,7 @@
         </p:nvSpPr>
         <p:spPr>
           <a:xfrm>
-            <a:off x="685800" y="1115568"/>
+            <a:off x="685800" y="1051560"/>
             <a:ext cx="7772400" cy="274320"/>
           </a:xfrm>
           <a:prstGeom prst="rect">
@@ -4823,8 +4840,8 @@
         </p:nvSpPr>
         <p:spPr>
           <a:xfrm>
-            <a:off x="685800" y="1417320"/>
-            <a:ext cx="7772400" cy="548640"/>
+            <a:off x="685800" y="1344168"/>
+            <a:ext cx="7772400" cy="685800"/>
           </a:xfrm>
           <a:prstGeom prst="rect">
             <a:avLst/>
@@ -4842,14 +4859,14 @@
               <a:buNone/>
             </a:pPr>
             <a:r>
-              <a:rPr lang="en-US" sz="1800" dirty="0">
+              <a:rPr lang="en-US" sz="1600" dirty="0">
                 <a:solidFill>
                   <a:schemeClr val="tx1"/>
                 </a:solidFill>
               </a:rPr>
-              <a:t>[한 문장]</a:t>
+              <a:t>[통계가 보여 준 사실을 숫자로]</a:t>
             </a:r>
-            <a:endParaRPr lang="en-US" sz="1800" dirty="0"/>
+            <a:endParaRPr lang="en-US" sz="1600" dirty="0"/>
           </a:p>
         </p:txBody>
       </p:sp>
@@ -4862,11 +4879,11 @@
         <p:spPr>
           <a:xfrm>
             <a:off x="457200" y="2194560"/>
-            <a:ext cx="8229600" cy="1051560"/>
+            <a:ext cx="8229600" cy="1115568"/>
           </a:xfrm>
           <a:prstGeom prst="roundRect">
             <a:avLst>
-              <a:gd name="adj" fmla="val 6957"/>
+              <a:gd name="adj" fmla="val 6557"/>
             </a:avLst>
           </a:prstGeom>
           <a:solidFill>
@@ -4888,7 +4905,7 @@
         </p:nvSpPr>
         <p:spPr>
           <a:xfrm>
-            <a:off x="685800" y="2304288"/>
+            <a:off x="685800" y="2286000"/>
             <a:ext cx="7772400" cy="274320"/>
           </a:xfrm>
           <a:prstGeom prst="rect">
@@ -4910,7 +4927,7 @@
                   <a:schemeClr val="tx2"/>
                 </a:solidFill>
               </a:rPr>
-              <a:t>그래서 나의 주장</a:t>
+              <a:t>통계 분석</a:t>
             </a:r>
             <a:endParaRPr lang="en-US" sz="1100" dirty="0"/>
           </a:p>
@@ -4924,8 +4941,8 @@
         </p:nvSpPr>
         <p:spPr>
           <a:xfrm>
-            <a:off x="685800" y="2606040"/>
-            <a:ext cx="7772400" cy="548640"/>
+            <a:off x="685800" y="2578608"/>
+            <a:ext cx="7772400" cy="685800"/>
           </a:xfrm>
           <a:prstGeom prst="rect">
             <a:avLst/>
@@ -4943,14 +4960,14 @@
               <a:buNone/>
             </a:pPr>
             <a:r>
-              <a:rPr lang="en-US" sz="1800" dirty="0">
+              <a:rPr lang="en-US" sz="1600" dirty="0">
                 <a:solidFill>
                   <a:schemeClr val="tx1"/>
                 </a:solidFill>
               </a:rPr>
-              <a:t>[한 문장]</a:t>
+              <a:t>[그 숫자를 어떻게 분석했나, 앞으로 어떻게 될까]</a:t>
             </a:r>
-            <a:endParaRPr lang="en-US" sz="1800" dirty="0"/>
+            <a:endParaRPr lang="en-US" sz="1600" dirty="0"/>
           </a:p>
         </p:txBody>
       </p:sp>
@@ -4962,12 +4979,12 @@
         </p:nvSpPr>
         <p:spPr>
           <a:xfrm>
-            <a:off x="457200" y="3383280"/>
-            <a:ext cx="8229600" cy="1051560"/>
+            <a:off x="457200" y="3429000"/>
+            <a:ext cx="8229600" cy="1115568"/>
           </a:xfrm>
           <a:prstGeom prst="roundRect">
             <a:avLst>
-              <a:gd name="adj" fmla="val 6957"/>
+              <a:gd name="adj" fmla="val 6557"/>
             </a:avLst>
           </a:prstGeom>
           <a:solidFill>
@@ -4989,7 +5006,7 @@
         </p:nvSpPr>
         <p:spPr>
           <a:xfrm>
-            <a:off x="685800" y="3493008"/>
+            <a:off x="685800" y="3520440"/>
             <a:ext cx="7772400" cy="274320"/>
           </a:xfrm>
           <a:prstGeom prst="rect">
@@ -5011,7 +5028,7 @@
                   <a:schemeClr val="tx2"/>
                 </a:solidFill>
               </a:rPr>
-              <a:t>제안</a:t>
+              <a:t>결론</a:t>
             </a:r>
             <a:endParaRPr lang="en-US" sz="1100" dirty="0"/>
           </a:p>
@@ -5025,8 +5042,8 @@
         </p:nvSpPr>
         <p:spPr>
           <a:xfrm>
-            <a:off x="685800" y="3794760"/>
-            <a:ext cx="7772400" cy="548640"/>
+            <a:off x="685800" y="3813048"/>
+            <a:ext cx="7772400" cy="685800"/>
           </a:xfrm>
           <a:prstGeom prst="rect">
             <a:avLst/>
@@ -5044,14 +5061,14 @@
               <a:buNone/>
             </a:pPr>
             <a:r>
-              <a:rPr lang="en-US" sz="1800" dirty="0">
+              <a:rPr lang="en-US" sz="1600" dirty="0">
                 <a:solidFill>
                   <a:schemeClr val="tx1"/>
                 </a:solidFill>
               </a:rPr>
-              <a:t>[무엇을 하자. 숫자를 넣으면 좋다]</a:t>
+              <a:t>[그래서 무엇을 하자, 나는 무엇을 하겠다. 숫자를 넣으면 좋다]</a:t>
             </a:r>
-            <a:endParaRPr lang="en-US" sz="1800" dirty="0"/>
+            <a:endParaRPr lang="en-US" sz="1600" dirty="0"/>
           </a:p>
         </p:txBody>
       </p:sp>

--- a/docs/2026-2학기-통계독서탐구-수행평가/발표틀.pptx
+++ b/docs/2026-2학기-통계독서탐구-수행평가/발표틀.pptx
@@ -110,7 +110,7 @@
   <p:extLst>
     <p:ext uri="{521415D9-36F7-43E2-AB2F-B90AF26B5E84}">
       <p14:sectionLst xmlns:p14="http://schemas.microsoft.com/office/powerpoint/2010/main">
-        <p14:section name="발표" id="{810c5f7e-f3c6-1e52-2fe8-82754696c6de}">
+        <p14:section name="발표" id="{89876c19-138b-5c05-afdd-b9f54cbf7205}">
           <p14:sldIdLst>
             <p14:sldId id="256"/>
             <p14:sldId id="257"/>
@@ -522,7 +522,7 @@
           <a:p>
             <a:r>
               <a:rPr lang="en-US" dirty="0"/>
-              <a:t>주장 한 문장과 참고한 책을 말합니다.</a:t>
+              <a:t>어떤 통계로 어떤 주장을 하는지 한 문장, 그리고 통계 활동에 조언을 얻은 책을 말합니다.</a:t>
             </a:r>
             <a:endParaRPr lang="en-US" dirty="0"/>
           </a:p>
@@ -1940,7 +1940,7 @@
                   <a:schemeClr val="tx1"/>
                 </a:solidFill>
               </a:rPr>
-              <a:t>이 책을 어떻게 썼나: [한 줄]</a:t>
+              <a:t>통계 활동에 얻은 조언: [한 줄]</a:t>
             </a:r>
             <a:endParaRPr lang="en-US" sz="1300" dirty="0"/>
           </a:p>

--- a/docs/2026-2학기-통계독서탐구-수행평가/발표틀.pptx
+++ b/docs/2026-2학기-통계독서탐구-수행평가/발표틀.pptx
@@ -110,7 +110,7 @@
   <p:extLst>
     <p:ext uri="{521415D9-36F7-43E2-AB2F-B90AF26B5E84}">
       <p14:sectionLst xmlns:p14="http://schemas.microsoft.com/office/powerpoint/2010/main">
-        <p14:section name="발표" id="{89876c19-138b-5c05-afdd-b9f54cbf7205}">
+        <p14:section name="발표" id="{281aa30c-5556-b188-1f49-44803efae530}">
           <p14:sldIdLst>
             <p14:sldId id="256"/>
             <p14:sldId id="257"/>
